--- a/Research/Chip_comparison.pptx
+++ b/Research/Chip_comparison.pptx
@@ -11,6 +11,9 @@
     <p:sldId id="257" r:id="rId5"/>
     <p:sldId id="261" r:id="rId6"/>
     <p:sldId id="260" r:id="rId7"/>
+    <p:sldId id="262" r:id="rId8"/>
+    <p:sldId id="263" r:id="rId9"/>
+    <p:sldId id="264" r:id="rId10"/>
   </p:sldIdLst>
   <p:sldSz cx="12192000" cy="6858000"/>
   <p:notesSz cx="6858000" cy="9144000"/>
@@ -111,7 +114,7 @@
   </p:defaultTextStyle>
   <p:extLst>
     <p:ext uri="{EFAFB233-063F-42B5-8137-9DF3F51BA10A}">
-      <p15:sldGuideLst xmlns:p15="http://schemas.microsoft.com/office/powerpoint/2012/main">
+      <p15:sldGuideLst xmlns="" xmlns:p15="http://schemas.microsoft.com/office/powerpoint/2012/main">
         <p15:guide id="1" orient="horz" pos="2160">
           <p15:clr>
             <a:srgbClr val="A4A3A4"/>
@@ -260,7 +263,7 @@
             <a:fld id="{4EA84CA3-116E-4ABF-8AA6-EBE32C84C16F}" type="datetimeFigureOut">
               <a:rPr lang="fr-FR" smtClean="0"/>
               <a:pPr/>
-              <a:t>27/08/2026</a:t>
+              <a:t>29/08/2026</a:t>
             </a:fld>
             <a:endParaRPr lang="fr-FR"/>
           </a:p>
@@ -312,7 +315,7 @@
     </p:spTree>
     <p:extLst>
       <p:ext uri="{BB962C8B-B14F-4D97-AF65-F5344CB8AC3E}">
-        <p14:creationId xmlns:p14="http://schemas.microsoft.com/office/powerpoint/2010/main" val="2003778223"/>
+        <p14:creationId xmlns="" xmlns:p14="http://schemas.microsoft.com/office/powerpoint/2010/main" val="2003778223"/>
       </p:ext>
     </p:extLst>
   </p:cSld>
@@ -432,7 +435,7 @@
             <a:fld id="{4EA84CA3-116E-4ABF-8AA6-EBE32C84C16F}" type="datetimeFigureOut">
               <a:rPr lang="fr-FR" smtClean="0"/>
               <a:pPr/>
-              <a:t>27/08/2026</a:t>
+              <a:t>29/08/2026</a:t>
             </a:fld>
             <a:endParaRPr lang="fr-FR"/>
           </a:p>
@@ -484,7 +487,7 @@
     </p:spTree>
     <p:extLst>
       <p:ext uri="{BB962C8B-B14F-4D97-AF65-F5344CB8AC3E}">
-        <p14:creationId xmlns:p14="http://schemas.microsoft.com/office/powerpoint/2010/main" val="3709322164"/>
+        <p14:creationId xmlns="" xmlns:p14="http://schemas.microsoft.com/office/powerpoint/2010/main" val="3709322164"/>
       </p:ext>
     </p:extLst>
   </p:cSld>
@@ -614,7 +617,7 @@
             <a:fld id="{4EA84CA3-116E-4ABF-8AA6-EBE32C84C16F}" type="datetimeFigureOut">
               <a:rPr lang="fr-FR" smtClean="0"/>
               <a:pPr/>
-              <a:t>27/08/2026</a:t>
+              <a:t>29/08/2026</a:t>
             </a:fld>
             <a:endParaRPr lang="fr-FR"/>
           </a:p>
@@ -666,7 +669,7 @@
     </p:spTree>
     <p:extLst>
       <p:ext uri="{BB962C8B-B14F-4D97-AF65-F5344CB8AC3E}">
-        <p14:creationId xmlns:p14="http://schemas.microsoft.com/office/powerpoint/2010/main" val="1419434073"/>
+        <p14:creationId xmlns="" xmlns:p14="http://schemas.microsoft.com/office/powerpoint/2010/main" val="1419434073"/>
       </p:ext>
     </p:extLst>
   </p:cSld>
@@ -786,7 +789,7 @@
             <a:fld id="{4EA84CA3-116E-4ABF-8AA6-EBE32C84C16F}" type="datetimeFigureOut">
               <a:rPr lang="fr-FR" smtClean="0"/>
               <a:pPr/>
-              <a:t>27/08/2026</a:t>
+              <a:t>29/08/2026</a:t>
             </a:fld>
             <a:endParaRPr lang="fr-FR"/>
           </a:p>
@@ -838,7 +841,7 @@
     </p:spTree>
     <p:extLst>
       <p:ext uri="{BB962C8B-B14F-4D97-AF65-F5344CB8AC3E}">
-        <p14:creationId xmlns:p14="http://schemas.microsoft.com/office/powerpoint/2010/main" val="1102157496"/>
+        <p14:creationId xmlns="" xmlns:p14="http://schemas.microsoft.com/office/powerpoint/2010/main" val="1102157496"/>
       </p:ext>
     </p:extLst>
   </p:cSld>
@@ -1034,7 +1037,7 @@
             <a:fld id="{4EA84CA3-116E-4ABF-8AA6-EBE32C84C16F}" type="datetimeFigureOut">
               <a:rPr lang="fr-FR" smtClean="0"/>
               <a:pPr/>
-              <a:t>27/08/2026</a:t>
+              <a:t>29/08/2026</a:t>
             </a:fld>
             <a:endParaRPr lang="fr-FR"/>
           </a:p>
@@ -1086,7 +1089,7 @@
     </p:spTree>
     <p:extLst>
       <p:ext uri="{BB962C8B-B14F-4D97-AF65-F5344CB8AC3E}">
-        <p14:creationId xmlns:p14="http://schemas.microsoft.com/office/powerpoint/2010/main" val="660080195"/>
+        <p14:creationId xmlns="" xmlns:p14="http://schemas.microsoft.com/office/powerpoint/2010/main" val="660080195"/>
       </p:ext>
     </p:extLst>
   </p:cSld>
@@ -1268,7 +1271,7 @@
             <a:fld id="{4EA84CA3-116E-4ABF-8AA6-EBE32C84C16F}" type="datetimeFigureOut">
               <a:rPr lang="fr-FR" smtClean="0"/>
               <a:pPr/>
-              <a:t>27/08/2026</a:t>
+              <a:t>29/08/2026</a:t>
             </a:fld>
             <a:endParaRPr lang="fr-FR"/>
           </a:p>
@@ -1320,7 +1323,7 @@
     </p:spTree>
     <p:extLst>
       <p:ext uri="{BB962C8B-B14F-4D97-AF65-F5344CB8AC3E}">
-        <p14:creationId xmlns:p14="http://schemas.microsoft.com/office/powerpoint/2010/main" val="2283449542"/>
+        <p14:creationId xmlns="" xmlns:p14="http://schemas.microsoft.com/office/powerpoint/2010/main" val="2283449542"/>
       </p:ext>
     </p:extLst>
   </p:cSld>
@@ -1637,7 +1640,7 @@
             <a:fld id="{4EA84CA3-116E-4ABF-8AA6-EBE32C84C16F}" type="datetimeFigureOut">
               <a:rPr lang="fr-FR" smtClean="0"/>
               <a:pPr/>
-              <a:t>27/08/2026</a:t>
+              <a:t>29/08/2026</a:t>
             </a:fld>
             <a:endParaRPr lang="fr-FR"/>
           </a:p>
@@ -1689,7 +1692,7 @@
     </p:spTree>
     <p:extLst>
       <p:ext uri="{BB962C8B-B14F-4D97-AF65-F5344CB8AC3E}">
-        <p14:creationId xmlns:p14="http://schemas.microsoft.com/office/powerpoint/2010/main" val="2663865323"/>
+        <p14:creationId xmlns="" xmlns:p14="http://schemas.microsoft.com/office/powerpoint/2010/main" val="2663865323"/>
       </p:ext>
     </p:extLst>
   </p:cSld>
@@ -1757,7 +1760,7 @@
             <a:fld id="{4EA84CA3-116E-4ABF-8AA6-EBE32C84C16F}" type="datetimeFigureOut">
               <a:rPr lang="fr-FR" smtClean="0"/>
               <a:pPr/>
-              <a:t>27/08/2026</a:t>
+              <a:t>29/08/2026</a:t>
             </a:fld>
             <a:endParaRPr lang="fr-FR"/>
           </a:p>
@@ -1809,7 +1812,7 @@
     </p:spTree>
     <p:extLst>
       <p:ext uri="{BB962C8B-B14F-4D97-AF65-F5344CB8AC3E}">
-        <p14:creationId xmlns:p14="http://schemas.microsoft.com/office/powerpoint/2010/main" val="376323583"/>
+        <p14:creationId xmlns="" xmlns:p14="http://schemas.microsoft.com/office/powerpoint/2010/main" val="376323583"/>
       </p:ext>
     </p:extLst>
   </p:cSld>
@@ -1854,7 +1857,7 @@
             <a:fld id="{4EA84CA3-116E-4ABF-8AA6-EBE32C84C16F}" type="datetimeFigureOut">
               <a:rPr lang="fr-FR" smtClean="0"/>
               <a:pPr/>
-              <a:t>27/08/2026</a:t>
+              <a:t>29/08/2026</a:t>
             </a:fld>
             <a:endParaRPr lang="fr-FR"/>
           </a:p>
@@ -1906,7 +1909,7 @@
     </p:spTree>
     <p:extLst>
       <p:ext uri="{BB962C8B-B14F-4D97-AF65-F5344CB8AC3E}">
-        <p14:creationId xmlns:p14="http://schemas.microsoft.com/office/powerpoint/2010/main" val="3989902220"/>
+        <p14:creationId xmlns="" xmlns:p14="http://schemas.microsoft.com/office/powerpoint/2010/main" val="3989902220"/>
       </p:ext>
     </p:extLst>
   </p:cSld>
@@ -2133,7 +2136,7 @@
             <a:fld id="{4EA84CA3-116E-4ABF-8AA6-EBE32C84C16F}" type="datetimeFigureOut">
               <a:rPr lang="fr-FR" smtClean="0"/>
               <a:pPr/>
-              <a:t>27/08/2026</a:t>
+              <a:t>29/08/2026</a:t>
             </a:fld>
             <a:endParaRPr lang="fr-FR"/>
           </a:p>
@@ -2185,7 +2188,7 @@
     </p:spTree>
     <p:extLst>
       <p:ext uri="{BB962C8B-B14F-4D97-AF65-F5344CB8AC3E}">
-        <p14:creationId xmlns:p14="http://schemas.microsoft.com/office/powerpoint/2010/main" val="1997102884"/>
+        <p14:creationId xmlns="" xmlns:p14="http://schemas.microsoft.com/office/powerpoint/2010/main" val="1997102884"/>
       </p:ext>
     </p:extLst>
   </p:cSld>
@@ -2388,7 +2391,7 @@
             <a:fld id="{4EA84CA3-116E-4ABF-8AA6-EBE32C84C16F}" type="datetimeFigureOut">
               <a:rPr lang="fr-FR" smtClean="0"/>
               <a:pPr/>
-              <a:t>27/08/2026</a:t>
+              <a:t>29/08/2026</a:t>
             </a:fld>
             <a:endParaRPr lang="fr-FR"/>
           </a:p>
@@ -2440,7 +2443,7 @@
     </p:spTree>
     <p:extLst>
       <p:ext uri="{BB962C8B-B14F-4D97-AF65-F5344CB8AC3E}">
-        <p14:creationId xmlns:p14="http://schemas.microsoft.com/office/powerpoint/2010/main" val="3738991770"/>
+        <p14:creationId xmlns="" xmlns:p14="http://schemas.microsoft.com/office/powerpoint/2010/main" val="3738991770"/>
       </p:ext>
     </p:extLst>
   </p:cSld>
@@ -2603,7 +2606,7 @@
             <a:fld id="{4EA84CA3-116E-4ABF-8AA6-EBE32C84C16F}" type="datetimeFigureOut">
               <a:rPr lang="fr-FR" smtClean="0"/>
               <a:pPr/>
-              <a:t>27/08/2026</a:t>
+              <a:t>29/08/2026</a:t>
             </a:fld>
             <a:endParaRPr lang="fr-FR"/>
           </a:p>
@@ -2691,7 +2694,7 @@
     </p:spTree>
     <p:extLst>
       <p:ext uri="{BB962C8B-B14F-4D97-AF65-F5344CB8AC3E}">
-        <p14:creationId xmlns:p14="http://schemas.microsoft.com/office/powerpoint/2010/main" val="4265157320"/>
+        <p14:creationId xmlns="" xmlns:p14="http://schemas.microsoft.com/office/powerpoint/2010/main" val="4265157320"/>
       </p:ext>
     </p:extLst>
   </p:cSld>
@@ -3671,7 +3674,7 @@
         <p:spPr>
           <a:xfrm>
             <a:off x="4248151" y="4000500"/>
-            <a:ext cx="1047750" cy="276999"/>
+            <a:ext cx="814503" cy="276999"/>
           </a:xfrm>
           <a:prstGeom prst="rect">
             <a:avLst/>
@@ -3794,7 +3797,7 @@
     </p:spTree>
     <p:extLst>
       <p:ext uri="{BB962C8B-B14F-4D97-AF65-F5344CB8AC3E}">
-        <p14:creationId xmlns:p14="http://schemas.microsoft.com/office/powerpoint/2010/main" val="3760226372"/>
+        <p14:creationId xmlns="" xmlns:p14="http://schemas.microsoft.com/office/powerpoint/2010/main" val="3760226372"/>
       </p:ext>
     </p:extLst>
   </p:cSld>
@@ -4680,7 +4683,7 @@
     </p:spTree>
     <p:extLst>
       <p:ext uri="{BB962C8B-B14F-4D97-AF65-F5344CB8AC3E}">
-        <p14:creationId xmlns:p14="http://schemas.microsoft.com/office/powerpoint/2010/main" val="3760226372"/>
+        <p14:creationId xmlns="" xmlns:p14="http://schemas.microsoft.com/office/powerpoint/2010/main" val="3760226372"/>
       </p:ext>
     </p:extLst>
   </p:cSld>
@@ -4781,7 +4784,7 @@
           <p:nvPr/>
         </p:nvPicPr>
         <p:blipFill>
-          <a:blip r:embed="rId2"/>
+          <a:blip r:embed="rId2" cstate="print"/>
           <a:stretch>
             <a:fillRect/>
           </a:stretch>
@@ -4805,7 +4808,7 @@
           <p:nvPr/>
         </p:nvPicPr>
         <p:blipFill>
-          <a:blip r:embed="rId3"/>
+          <a:blip r:embed="rId3" cstate="print"/>
           <a:stretch>
             <a:fillRect/>
           </a:stretch>
@@ -4829,7 +4832,7 @@
           <p:nvPr/>
         </p:nvPicPr>
         <p:blipFill>
-          <a:blip r:embed="rId4"/>
+          <a:blip r:embed="rId4" cstate="print"/>
           <a:stretch>
             <a:fillRect/>
           </a:stretch>
@@ -4853,7 +4856,7 @@
           <p:nvPr/>
         </p:nvPicPr>
         <p:blipFill>
-          <a:blip r:embed="rId5"/>
+          <a:blip r:embed="rId5" cstate="print"/>
           <a:stretch>
             <a:fillRect/>
           </a:stretch>
@@ -4871,7 +4874,7 @@
     </p:spTree>
     <p:extLst>
       <p:ext uri="{BB962C8B-B14F-4D97-AF65-F5344CB8AC3E}">
-        <p14:creationId xmlns:p14="http://schemas.microsoft.com/office/powerpoint/2010/main" val="3452558061"/>
+        <p14:creationId xmlns="" xmlns:p14="http://schemas.microsoft.com/office/powerpoint/2010/main" val="3452558061"/>
       </p:ext>
     </p:extLst>
   </p:cSld>
@@ -4907,14 +4910,14 @@
           <p:nvPr/>
         </p:nvPicPr>
         <p:blipFill>
-          <a:blip r:embed="rId2"/>
+          <a:blip r:embed="rId2" cstate="print"/>
           <a:stretch>
             <a:fillRect/>
           </a:stretch>
         </p:blipFill>
         <p:spPr>
           <a:xfrm>
-            <a:off x="656858" y="394744"/>
+            <a:off x="801824" y="383593"/>
             <a:ext cx="3175309" cy="5915645"/>
           </a:xfrm>
           <a:prstGeom prst="rect">
@@ -4931,14 +4934,14 @@
           <p:nvPr/>
         </p:nvPicPr>
         <p:blipFill>
-          <a:blip r:embed="rId3"/>
+          <a:blip r:embed="rId3" cstate="print"/>
           <a:stretch>
             <a:fillRect/>
           </a:stretch>
         </p:blipFill>
         <p:spPr>
           <a:xfrm>
-            <a:off x="3906981" y="407324"/>
+            <a:off x="4246899" y="451929"/>
             <a:ext cx="7945101" cy="5810596"/>
           </a:xfrm>
           <a:prstGeom prst="rect">
@@ -4946,12 +4949,588 @@
           </a:prstGeom>
         </p:spPr>
       </p:pic>
+      <p:sp>
+        <p:nvSpPr>
+          <p:cNvPr id="4" name="ZoneTexte 3"/>
+          <p:cNvSpPr txBox="1"/>
+          <p:nvPr/>
+        </p:nvSpPr>
+        <p:spPr>
+          <a:xfrm>
+            <a:off x="0" y="3315396"/>
+            <a:ext cx="1048215" cy="276999"/>
+          </a:xfrm>
+          <a:prstGeom prst="rect">
+            <a:avLst/>
+          </a:prstGeom>
+          <a:noFill/>
+        </p:spPr>
+        <p:txBody>
+          <a:bodyPr wrap="square" rtlCol="0">
+            <a:spAutoFit/>
+          </a:bodyPr>
+          <a:lstStyle/>
+          <a:p>
+            <a:r>
+              <a:rPr lang="fr-FR" sz="1200" dirty="0" smtClean="0">
+                <a:solidFill>
+                  <a:srgbClr val="FF0000"/>
+                </a:solidFill>
+              </a:rPr>
+              <a:t>GND on PCB</a:t>
+            </a:r>
+            <a:endParaRPr lang="fr-FR" sz="1200" dirty="0">
+              <a:solidFill>
+                <a:srgbClr val="FF0000"/>
+              </a:solidFill>
+            </a:endParaRPr>
+          </a:p>
+        </p:txBody>
+      </p:sp>
+      <p:sp>
+        <p:nvSpPr>
+          <p:cNvPr id="5" name="ZoneTexte 4"/>
+          <p:cNvSpPr txBox="1"/>
+          <p:nvPr/>
+        </p:nvSpPr>
+        <p:spPr>
+          <a:xfrm>
+            <a:off x="3746346" y="3309124"/>
+            <a:ext cx="814503" cy="276999"/>
+          </a:xfrm>
+          <a:prstGeom prst="rect">
+            <a:avLst/>
+          </a:prstGeom>
+          <a:noFill/>
+        </p:spPr>
+        <p:txBody>
+          <a:bodyPr wrap="square" rtlCol="0">
+            <a:spAutoFit/>
+          </a:bodyPr>
+          <a:lstStyle/>
+          <a:p>
+            <a:r>
+              <a:rPr lang="fr-FR" sz="1200" dirty="0" smtClean="0">
+                <a:solidFill>
+                  <a:srgbClr val="FF0000"/>
+                </a:solidFill>
+              </a:rPr>
+              <a:t>To 3.3V</a:t>
+            </a:r>
+            <a:endParaRPr lang="fr-FR" sz="1200" baseline="-25000" dirty="0">
+              <a:solidFill>
+                <a:srgbClr val="FF0000"/>
+              </a:solidFill>
+            </a:endParaRPr>
+          </a:p>
+        </p:txBody>
+      </p:sp>
     </p:spTree>
     <p:extLst>
       <p:ext uri="{BB962C8B-B14F-4D97-AF65-F5344CB8AC3E}">
-        <p14:creationId xmlns:p14="http://schemas.microsoft.com/office/powerpoint/2010/main" val="141957672"/>
+        <p14:creationId xmlns="" xmlns:p14="http://schemas.microsoft.com/office/powerpoint/2010/main" val="141957672"/>
       </p:ext>
     </p:extLst>
+  </p:cSld>
+  <p:clrMapOvr>
+    <a:masterClrMapping/>
+  </p:clrMapOvr>
+</p:sld>
+</file>
+
+<file path=ppt/slides/slide7.xml><?xml version="1.0" encoding="utf-8"?>
+<p:sld xmlns:a="http://schemas.openxmlformats.org/drawingml/2006/main" xmlns:r="http://schemas.openxmlformats.org/officeDocument/2006/relationships" xmlns:p="http://schemas.openxmlformats.org/presentationml/2006/main">
+  <p:cSld>
+    <p:spTree>
+      <p:nvGrpSpPr>
+        <p:cNvPr id="1" name=""/>
+        <p:cNvGrpSpPr/>
+        <p:nvPr/>
+      </p:nvGrpSpPr>
+      <p:grpSpPr>
+        <a:xfrm>
+          <a:off x="0" y="0"/>
+          <a:ext cx="0" cy="0"/>
+          <a:chOff x="0" y="0"/>
+          <a:chExt cx="0" cy="0"/>
+        </a:xfrm>
+      </p:grpSpPr>
+      <p:pic>
+        <p:nvPicPr>
+          <p:cNvPr id="7" name="Image 6"/>
+          <p:cNvPicPr>
+            <a:picLocks noChangeAspect="1"/>
+          </p:cNvPicPr>
+          <p:nvPr/>
+        </p:nvPicPr>
+        <p:blipFill>
+          <a:blip r:embed="rId2" cstate="print"/>
+          <a:stretch>
+            <a:fillRect/>
+          </a:stretch>
+        </p:blipFill>
+        <p:spPr>
+          <a:xfrm>
+            <a:off x="868731" y="446512"/>
+            <a:ext cx="3112253" cy="5798171"/>
+          </a:xfrm>
+          <a:prstGeom prst="rect">
+            <a:avLst/>
+          </a:prstGeom>
+        </p:spPr>
+      </p:pic>
+      <p:pic>
+        <p:nvPicPr>
+          <p:cNvPr id="1026" name="Picture 2"/>
+          <p:cNvPicPr>
+            <a:picLocks noChangeAspect="1" noChangeArrowheads="1"/>
+          </p:cNvPicPr>
+          <p:nvPr/>
+        </p:nvPicPr>
+        <p:blipFill>
+          <a:blip r:embed="rId3" cstate="print"/>
+          <a:srcRect/>
+          <a:stretch>
+            <a:fillRect/>
+          </a:stretch>
+        </p:blipFill>
+        <p:spPr bwMode="auto">
+          <a:xfrm>
+            <a:off x="4984594" y="400399"/>
+            <a:ext cx="7207405" cy="5978099"/>
+          </a:xfrm>
+          <a:prstGeom prst="rect">
+            <a:avLst/>
+          </a:prstGeom>
+          <a:noFill/>
+          <a:ln w="9525">
+            <a:noFill/>
+            <a:miter lim="800000"/>
+            <a:headEnd/>
+            <a:tailEnd/>
+          </a:ln>
+          <a:effectLst/>
+        </p:spPr>
+      </p:pic>
+      <p:sp>
+        <p:nvSpPr>
+          <p:cNvPr id="11" name="ZoneTexte 10"/>
+          <p:cNvSpPr txBox="1"/>
+          <p:nvPr/>
+        </p:nvSpPr>
+        <p:spPr>
+          <a:xfrm>
+            <a:off x="0" y="3579309"/>
+            <a:ext cx="952500" cy="276999"/>
+          </a:xfrm>
+          <a:prstGeom prst="rect">
+            <a:avLst/>
+          </a:prstGeom>
+          <a:noFill/>
+        </p:spPr>
+        <p:txBody>
+          <a:bodyPr wrap="square" rtlCol="0">
+            <a:spAutoFit/>
+          </a:bodyPr>
+          <a:lstStyle/>
+          <a:p>
+            <a:r>
+              <a:rPr lang="fr-FR" sz="1200" dirty="0" smtClean="0">
+                <a:solidFill>
+                  <a:srgbClr val="FF0000"/>
+                </a:solidFill>
+              </a:rPr>
+              <a:t>GND on PCB</a:t>
+            </a:r>
+            <a:endParaRPr lang="fr-FR" sz="1200" dirty="0">
+              <a:solidFill>
+                <a:srgbClr val="FF0000"/>
+              </a:solidFill>
+            </a:endParaRPr>
+          </a:p>
+        </p:txBody>
+      </p:sp>
+      <p:sp>
+        <p:nvSpPr>
+          <p:cNvPr id="12" name="ZoneTexte 11"/>
+          <p:cNvSpPr txBox="1"/>
+          <p:nvPr/>
+        </p:nvSpPr>
+        <p:spPr>
+          <a:xfrm>
+            <a:off x="3837181" y="3525179"/>
+            <a:ext cx="1209675" cy="276999"/>
+          </a:xfrm>
+          <a:prstGeom prst="rect">
+            <a:avLst/>
+          </a:prstGeom>
+          <a:noFill/>
+        </p:spPr>
+        <p:txBody>
+          <a:bodyPr wrap="square" rtlCol="0">
+            <a:spAutoFit/>
+          </a:bodyPr>
+          <a:lstStyle/>
+          <a:p>
+            <a:r>
+              <a:rPr lang="fr-FR" sz="1200" dirty="0" smtClean="0">
+                <a:solidFill>
+                  <a:srgbClr val="FF0000"/>
+                </a:solidFill>
+              </a:rPr>
+              <a:t>GND on PCB</a:t>
+            </a:r>
+            <a:endParaRPr lang="fr-FR" sz="1200" dirty="0">
+              <a:solidFill>
+                <a:srgbClr val="FF0000"/>
+              </a:solidFill>
+            </a:endParaRPr>
+          </a:p>
+        </p:txBody>
+      </p:sp>
+      <p:sp>
+        <p:nvSpPr>
+          <p:cNvPr id="13" name="ZoneTexte 12"/>
+          <p:cNvSpPr txBox="1"/>
+          <p:nvPr/>
+        </p:nvSpPr>
+        <p:spPr>
+          <a:xfrm>
+            <a:off x="9525" y="3360002"/>
+            <a:ext cx="952500" cy="276999"/>
+          </a:xfrm>
+          <a:prstGeom prst="rect">
+            <a:avLst/>
+          </a:prstGeom>
+          <a:noFill/>
+        </p:spPr>
+        <p:txBody>
+          <a:bodyPr wrap="square" rtlCol="0">
+            <a:spAutoFit/>
+          </a:bodyPr>
+          <a:lstStyle/>
+          <a:p>
+            <a:r>
+              <a:rPr lang="fr-FR" sz="1200" dirty="0" smtClean="0">
+                <a:solidFill>
+                  <a:srgbClr val="FF0000"/>
+                </a:solidFill>
+              </a:rPr>
+              <a:t>GND on PCB</a:t>
+            </a:r>
+            <a:endParaRPr lang="fr-FR" sz="1200" dirty="0">
+              <a:solidFill>
+                <a:srgbClr val="FF0000"/>
+              </a:solidFill>
+            </a:endParaRPr>
+          </a:p>
+        </p:txBody>
+      </p:sp>
+      <p:sp>
+        <p:nvSpPr>
+          <p:cNvPr id="14" name="ZoneTexte 13"/>
+          <p:cNvSpPr txBox="1"/>
+          <p:nvPr/>
+        </p:nvSpPr>
+        <p:spPr>
+          <a:xfrm>
+            <a:off x="0" y="3765163"/>
+            <a:ext cx="993388" cy="276999"/>
+          </a:xfrm>
+          <a:prstGeom prst="rect">
+            <a:avLst/>
+          </a:prstGeom>
+          <a:noFill/>
+        </p:spPr>
+        <p:txBody>
+          <a:bodyPr wrap="square" rtlCol="0">
+            <a:spAutoFit/>
+          </a:bodyPr>
+          <a:lstStyle/>
+          <a:p>
+            <a:r>
+              <a:rPr lang="fr-FR" sz="1200" dirty="0" smtClean="0">
+                <a:solidFill>
+                  <a:srgbClr val="FF0000"/>
+                </a:solidFill>
+              </a:rPr>
+              <a:t>To LS139 O</a:t>
+            </a:r>
+            <a:r>
+              <a:rPr lang="fr-FR" sz="1200" baseline="-25000" dirty="0" smtClean="0">
+                <a:solidFill>
+                  <a:srgbClr val="FF0000"/>
+                </a:solidFill>
+              </a:rPr>
+              <a:t>0a</a:t>
+            </a:r>
+            <a:endParaRPr lang="fr-FR" sz="1200" baseline="-25000" dirty="0">
+              <a:solidFill>
+                <a:srgbClr val="FF0000"/>
+              </a:solidFill>
+            </a:endParaRPr>
+          </a:p>
+        </p:txBody>
+      </p:sp>
+      <p:sp>
+        <p:nvSpPr>
+          <p:cNvPr id="15" name="ZoneTexte 14"/>
+          <p:cNvSpPr txBox="1"/>
+          <p:nvPr/>
+        </p:nvSpPr>
+        <p:spPr>
+          <a:xfrm>
+            <a:off x="3846707" y="3297973"/>
+            <a:ext cx="1047750" cy="276999"/>
+          </a:xfrm>
+          <a:prstGeom prst="rect">
+            <a:avLst/>
+          </a:prstGeom>
+          <a:noFill/>
+        </p:spPr>
+        <p:txBody>
+          <a:bodyPr wrap="square" rtlCol="0">
+            <a:spAutoFit/>
+          </a:bodyPr>
+          <a:lstStyle/>
+          <a:p>
+            <a:r>
+              <a:rPr lang="fr-FR" sz="1200" dirty="0" smtClean="0">
+                <a:solidFill>
+                  <a:srgbClr val="FF0000"/>
+                </a:solidFill>
+              </a:rPr>
+              <a:t>To 3.3V</a:t>
+            </a:r>
+            <a:endParaRPr lang="fr-FR" sz="1200" baseline="-25000" dirty="0">
+              <a:solidFill>
+                <a:srgbClr val="FF0000"/>
+              </a:solidFill>
+            </a:endParaRPr>
+          </a:p>
+        </p:txBody>
+      </p:sp>
+    </p:spTree>
+    <p:extLst>
+      <p:ext uri="{BB962C8B-B14F-4D97-AF65-F5344CB8AC3E}">
+        <p14:creationId xmlns="" xmlns:p14="http://schemas.microsoft.com/office/powerpoint/2010/main" val="141957672"/>
+      </p:ext>
+    </p:extLst>
+  </p:cSld>
+  <p:clrMapOvr>
+    <a:masterClrMapping/>
+  </p:clrMapOvr>
+</p:sld>
+</file>
+
+<file path=ppt/slides/slide8.xml><?xml version="1.0" encoding="utf-8"?>
+<p:sld xmlns:a="http://schemas.openxmlformats.org/drawingml/2006/main" xmlns:r="http://schemas.openxmlformats.org/officeDocument/2006/relationships" xmlns:p="http://schemas.openxmlformats.org/presentationml/2006/main">
+  <p:cSld>
+    <p:spTree>
+      <p:nvGrpSpPr>
+        <p:cNvPr id="1" name=""/>
+        <p:cNvGrpSpPr/>
+        <p:nvPr/>
+      </p:nvGrpSpPr>
+      <p:grpSpPr>
+        <a:xfrm>
+          <a:off x="0" y="0"/>
+          <a:ext cx="0" cy="0"/>
+          <a:chOff x="0" y="0"/>
+          <a:chExt cx="0" cy="0"/>
+        </a:xfrm>
+      </p:grpSpPr>
+      <p:pic>
+        <p:nvPicPr>
+          <p:cNvPr id="1026" name="Picture 2"/>
+          <p:cNvPicPr>
+            <a:picLocks noChangeAspect="1" noChangeArrowheads="1"/>
+          </p:cNvPicPr>
+          <p:nvPr/>
+        </p:nvPicPr>
+        <p:blipFill>
+          <a:blip r:embed="rId2" cstate="print"/>
+          <a:srcRect/>
+          <a:stretch>
+            <a:fillRect/>
+          </a:stretch>
+        </p:blipFill>
+        <p:spPr bwMode="auto">
+          <a:xfrm>
+            <a:off x="281182" y="423901"/>
+            <a:ext cx="8078788" cy="6030913"/>
+          </a:xfrm>
+          <a:prstGeom prst="rect">
+            <a:avLst/>
+          </a:prstGeom>
+          <a:noFill/>
+          <a:ln w="9525">
+            <a:noFill/>
+            <a:miter lim="800000"/>
+            <a:headEnd/>
+            <a:tailEnd/>
+          </a:ln>
+          <a:effectLst/>
+        </p:spPr>
+      </p:pic>
+      <p:pic>
+        <p:nvPicPr>
+          <p:cNvPr id="1027" name="Picture 3"/>
+          <p:cNvPicPr>
+            <a:picLocks noChangeAspect="1" noChangeArrowheads="1"/>
+          </p:cNvPicPr>
+          <p:nvPr/>
+        </p:nvPicPr>
+        <p:blipFill>
+          <a:blip r:embed="rId3" cstate="print"/>
+          <a:srcRect/>
+          <a:stretch>
+            <a:fillRect/>
+          </a:stretch>
+        </p:blipFill>
+        <p:spPr bwMode="auto">
+          <a:xfrm>
+            <a:off x="8528165" y="82280"/>
+            <a:ext cx="3429000" cy="6697663"/>
+          </a:xfrm>
+          <a:prstGeom prst="rect">
+            <a:avLst/>
+          </a:prstGeom>
+          <a:noFill/>
+          <a:ln w="9525">
+            <a:noFill/>
+            <a:miter lim="800000"/>
+            <a:headEnd/>
+            <a:tailEnd/>
+          </a:ln>
+          <a:effectLst/>
+        </p:spPr>
+      </p:pic>
+    </p:spTree>
+  </p:cSld>
+  <p:clrMapOvr>
+    <a:masterClrMapping/>
+  </p:clrMapOvr>
+</p:sld>
+</file>
+
+<file path=ppt/slides/slide9.xml><?xml version="1.0" encoding="utf-8"?>
+<p:sld xmlns:a="http://schemas.openxmlformats.org/drawingml/2006/main" xmlns:r="http://schemas.openxmlformats.org/officeDocument/2006/relationships" xmlns:p="http://schemas.openxmlformats.org/presentationml/2006/main">
+  <p:cSld>
+    <p:spTree>
+      <p:nvGrpSpPr>
+        <p:cNvPr id="1" name=""/>
+        <p:cNvGrpSpPr/>
+        <p:nvPr/>
+      </p:nvGrpSpPr>
+      <p:grpSpPr>
+        <a:xfrm>
+          <a:off x="0" y="0"/>
+          <a:ext cx="0" cy="0"/>
+          <a:chOff x="0" y="0"/>
+          <a:chExt cx="0" cy="0"/>
+        </a:xfrm>
+      </p:grpSpPr>
+      <p:pic>
+        <p:nvPicPr>
+          <p:cNvPr id="2050" name="Picture 2"/>
+          <p:cNvPicPr>
+            <a:picLocks noChangeAspect="1" noChangeArrowheads="1"/>
+          </p:cNvPicPr>
+          <p:nvPr/>
+        </p:nvPicPr>
+        <p:blipFill>
+          <a:blip r:embed="rId2" cstate="print"/>
+          <a:srcRect/>
+          <a:stretch>
+            <a:fillRect/>
+          </a:stretch>
+        </p:blipFill>
+        <p:spPr bwMode="auto">
+          <a:xfrm>
+            <a:off x="4354351" y="0"/>
+            <a:ext cx="3563007" cy="6857455"/>
+          </a:xfrm>
+          <a:prstGeom prst="rect">
+            <a:avLst/>
+          </a:prstGeom>
+          <a:noFill/>
+          <a:ln w="9525">
+            <a:noFill/>
+            <a:miter lim="800000"/>
+            <a:headEnd/>
+            <a:tailEnd/>
+          </a:ln>
+          <a:effectLst/>
+        </p:spPr>
+      </p:pic>
+      <p:pic>
+        <p:nvPicPr>
+          <p:cNvPr id="5" name="Picture 3"/>
+          <p:cNvPicPr>
+            <a:picLocks noChangeAspect="1" noChangeArrowheads="1"/>
+          </p:cNvPicPr>
+          <p:nvPr/>
+        </p:nvPicPr>
+        <p:blipFill>
+          <a:blip r:embed="rId3" cstate="print"/>
+          <a:srcRect/>
+          <a:stretch>
+            <a:fillRect/>
+          </a:stretch>
+        </p:blipFill>
+        <p:spPr bwMode="auto">
+          <a:xfrm>
+            <a:off x="822663" y="82280"/>
+            <a:ext cx="3429000" cy="6697663"/>
+          </a:xfrm>
+          <a:prstGeom prst="rect">
+            <a:avLst/>
+          </a:prstGeom>
+          <a:noFill/>
+          <a:ln w="9525">
+            <a:noFill/>
+            <a:miter lim="800000"/>
+            <a:headEnd/>
+            <a:tailEnd/>
+          </a:ln>
+          <a:effectLst/>
+        </p:spPr>
+      </p:pic>
+      <p:pic>
+        <p:nvPicPr>
+          <p:cNvPr id="2051" name="Picture 3"/>
+          <p:cNvPicPr>
+            <a:picLocks noChangeAspect="1" noChangeArrowheads="1"/>
+          </p:cNvPicPr>
+          <p:nvPr/>
+        </p:nvPicPr>
+        <p:blipFill>
+          <a:blip r:embed="rId4" cstate="print"/>
+          <a:srcRect/>
+          <a:stretch>
+            <a:fillRect/>
+          </a:stretch>
+        </p:blipFill>
+        <p:spPr bwMode="auto">
+          <a:xfrm>
+            <a:off x="7940049" y="33453"/>
+            <a:ext cx="3411885" cy="6775692"/>
+          </a:xfrm>
+          <a:prstGeom prst="rect">
+            <a:avLst/>
+          </a:prstGeom>
+          <a:noFill/>
+          <a:ln w="9525">
+            <a:noFill/>
+            <a:miter lim="800000"/>
+            <a:headEnd/>
+            <a:tailEnd/>
+          </a:ln>
+          <a:effectLst/>
+        </p:spPr>
+      </p:pic>
+    </p:spTree>
   </p:cSld>
   <p:clrMapOvr>
     <a:masterClrMapping/>
@@ -5214,7 +5793,7 @@
   <a:extraClrSchemeLst/>
   <a:extLst>
     <a:ext uri="{05A4C25C-085E-4340-85A3-A5531E510DB2}">
-      <thm15:themeFamily xmlns:thm15="http://schemas.microsoft.com/office/thememl/2012/main" name="Office Theme" id="{62F939B6-93AF-4DB8-9C6B-D6C7DFDC589F}" vid="{4A3C46E8-61CC-4603-A589-7422A47A8E4A}"/>
+      <thm15:themeFamily xmlns="" xmlns:thm15="http://schemas.microsoft.com/office/thememl/2012/main" name="Office Theme" id="{62F939B6-93AF-4DB8-9C6B-D6C7DFDC589F}" vid="{4A3C46E8-61CC-4603-A589-7422A47A8E4A}"/>
     </a:ext>
   </a:extLst>
 </a:theme>

--- a/Research/Chip_comparison.pptx
+++ b/Research/Chip_comparison.pptx
@@ -14,6 +14,7 @@
     <p:sldId id="262" r:id="rId8"/>
     <p:sldId id="263" r:id="rId9"/>
     <p:sldId id="264" r:id="rId10"/>
+    <p:sldId id="265" r:id="rId11"/>
   </p:sldIdLst>
   <p:sldSz cx="12192000" cy="6858000"/>
   <p:notesSz cx="6858000" cy="9144000"/>
@@ -114,7 +115,7 @@
   </p:defaultTextStyle>
   <p:extLst>
     <p:ext uri="{EFAFB233-063F-42B5-8137-9DF3F51BA10A}">
-      <p15:sldGuideLst xmlns="" xmlns:p15="http://schemas.microsoft.com/office/powerpoint/2012/main">
+      <p15:sldGuideLst xmlns:p15="http://schemas.microsoft.com/office/powerpoint/2012/main" xmlns="">
         <p15:guide id="1" orient="horz" pos="2160">
           <p15:clr>
             <a:srgbClr val="A4A3A4"/>
@@ -263,7 +264,7 @@
             <a:fld id="{4EA84CA3-116E-4ABF-8AA6-EBE32C84C16F}" type="datetimeFigureOut">
               <a:rPr lang="fr-FR" smtClean="0"/>
               <a:pPr/>
-              <a:t>29/08/2026</a:t>
+              <a:t>04/09/2026</a:t>
             </a:fld>
             <a:endParaRPr lang="fr-FR"/>
           </a:p>
@@ -315,7 +316,7 @@
     </p:spTree>
     <p:extLst>
       <p:ext uri="{BB962C8B-B14F-4D97-AF65-F5344CB8AC3E}">
-        <p14:creationId xmlns="" xmlns:p14="http://schemas.microsoft.com/office/powerpoint/2010/main" val="2003778223"/>
+        <p14:creationId xmlns:p14="http://schemas.microsoft.com/office/powerpoint/2010/main" xmlns="" val="2003778223"/>
       </p:ext>
     </p:extLst>
   </p:cSld>
@@ -435,7 +436,7 @@
             <a:fld id="{4EA84CA3-116E-4ABF-8AA6-EBE32C84C16F}" type="datetimeFigureOut">
               <a:rPr lang="fr-FR" smtClean="0"/>
               <a:pPr/>
-              <a:t>29/08/2026</a:t>
+              <a:t>04/09/2026</a:t>
             </a:fld>
             <a:endParaRPr lang="fr-FR"/>
           </a:p>
@@ -487,7 +488,7 @@
     </p:spTree>
     <p:extLst>
       <p:ext uri="{BB962C8B-B14F-4D97-AF65-F5344CB8AC3E}">
-        <p14:creationId xmlns="" xmlns:p14="http://schemas.microsoft.com/office/powerpoint/2010/main" val="3709322164"/>
+        <p14:creationId xmlns:p14="http://schemas.microsoft.com/office/powerpoint/2010/main" xmlns="" val="3709322164"/>
       </p:ext>
     </p:extLst>
   </p:cSld>
@@ -617,7 +618,7 @@
             <a:fld id="{4EA84CA3-116E-4ABF-8AA6-EBE32C84C16F}" type="datetimeFigureOut">
               <a:rPr lang="fr-FR" smtClean="0"/>
               <a:pPr/>
-              <a:t>29/08/2026</a:t>
+              <a:t>04/09/2026</a:t>
             </a:fld>
             <a:endParaRPr lang="fr-FR"/>
           </a:p>
@@ -669,7 +670,7 @@
     </p:spTree>
     <p:extLst>
       <p:ext uri="{BB962C8B-B14F-4D97-AF65-F5344CB8AC3E}">
-        <p14:creationId xmlns="" xmlns:p14="http://schemas.microsoft.com/office/powerpoint/2010/main" val="1419434073"/>
+        <p14:creationId xmlns:p14="http://schemas.microsoft.com/office/powerpoint/2010/main" xmlns="" val="1419434073"/>
       </p:ext>
     </p:extLst>
   </p:cSld>
@@ -789,7 +790,7 @@
             <a:fld id="{4EA84CA3-116E-4ABF-8AA6-EBE32C84C16F}" type="datetimeFigureOut">
               <a:rPr lang="fr-FR" smtClean="0"/>
               <a:pPr/>
-              <a:t>29/08/2026</a:t>
+              <a:t>04/09/2026</a:t>
             </a:fld>
             <a:endParaRPr lang="fr-FR"/>
           </a:p>
@@ -841,7 +842,7 @@
     </p:spTree>
     <p:extLst>
       <p:ext uri="{BB962C8B-B14F-4D97-AF65-F5344CB8AC3E}">
-        <p14:creationId xmlns="" xmlns:p14="http://schemas.microsoft.com/office/powerpoint/2010/main" val="1102157496"/>
+        <p14:creationId xmlns:p14="http://schemas.microsoft.com/office/powerpoint/2010/main" xmlns="" val="1102157496"/>
       </p:ext>
     </p:extLst>
   </p:cSld>
@@ -1037,7 +1038,7 @@
             <a:fld id="{4EA84CA3-116E-4ABF-8AA6-EBE32C84C16F}" type="datetimeFigureOut">
               <a:rPr lang="fr-FR" smtClean="0"/>
               <a:pPr/>
-              <a:t>29/08/2026</a:t>
+              <a:t>04/09/2026</a:t>
             </a:fld>
             <a:endParaRPr lang="fr-FR"/>
           </a:p>
@@ -1089,7 +1090,7 @@
     </p:spTree>
     <p:extLst>
       <p:ext uri="{BB962C8B-B14F-4D97-AF65-F5344CB8AC3E}">
-        <p14:creationId xmlns="" xmlns:p14="http://schemas.microsoft.com/office/powerpoint/2010/main" val="660080195"/>
+        <p14:creationId xmlns:p14="http://schemas.microsoft.com/office/powerpoint/2010/main" xmlns="" val="660080195"/>
       </p:ext>
     </p:extLst>
   </p:cSld>
@@ -1271,7 +1272,7 @@
             <a:fld id="{4EA84CA3-116E-4ABF-8AA6-EBE32C84C16F}" type="datetimeFigureOut">
               <a:rPr lang="fr-FR" smtClean="0"/>
               <a:pPr/>
-              <a:t>29/08/2026</a:t>
+              <a:t>04/09/2026</a:t>
             </a:fld>
             <a:endParaRPr lang="fr-FR"/>
           </a:p>
@@ -1323,7 +1324,7 @@
     </p:spTree>
     <p:extLst>
       <p:ext uri="{BB962C8B-B14F-4D97-AF65-F5344CB8AC3E}">
-        <p14:creationId xmlns="" xmlns:p14="http://schemas.microsoft.com/office/powerpoint/2010/main" val="2283449542"/>
+        <p14:creationId xmlns:p14="http://schemas.microsoft.com/office/powerpoint/2010/main" xmlns="" val="2283449542"/>
       </p:ext>
     </p:extLst>
   </p:cSld>
@@ -1640,7 +1641,7 @@
             <a:fld id="{4EA84CA3-116E-4ABF-8AA6-EBE32C84C16F}" type="datetimeFigureOut">
               <a:rPr lang="fr-FR" smtClean="0"/>
               <a:pPr/>
-              <a:t>29/08/2026</a:t>
+              <a:t>04/09/2026</a:t>
             </a:fld>
             <a:endParaRPr lang="fr-FR"/>
           </a:p>
@@ -1692,7 +1693,7 @@
     </p:spTree>
     <p:extLst>
       <p:ext uri="{BB962C8B-B14F-4D97-AF65-F5344CB8AC3E}">
-        <p14:creationId xmlns="" xmlns:p14="http://schemas.microsoft.com/office/powerpoint/2010/main" val="2663865323"/>
+        <p14:creationId xmlns:p14="http://schemas.microsoft.com/office/powerpoint/2010/main" xmlns="" val="2663865323"/>
       </p:ext>
     </p:extLst>
   </p:cSld>
@@ -1760,7 +1761,7 @@
             <a:fld id="{4EA84CA3-116E-4ABF-8AA6-EBE32C84C16F}" type="datetimeFigureOut">
               <a:rPr lang="fr-FR" smtClean="0"/>
               <a:pPr/>
-              <a:t>29/08/2026</a:t>
+              <a:t>04/09/2026</a:t>
             </a:fld>
             <a:endParaRPr lang="fr-FR"/>
           </a:p>
@@ -1812,7 +1813,7 @@
     </p:spTree>
     <p:extLst>
       <p:ext uri="{BB962C8B-B14F-4D97-AF65-F5344CB8AC3E}">
-        <p14:creationId xmlns="" xmlns:p14="http://schemas.microsoft.com/office/powerpoint/2010/main" val="376323583"/>
+        <p14:creationId xmlns:p14="http://schemas.microsoft.com/office/powerpoint/2010/main" xmlns="" val="376323583"/>
       </p:ext>
     </p:extLst>
   </p:cSld>
@@ -1857,7 +1858,7 @@
             <a:fld id="{4EA84CA3-116E-4ABF-8AA6-EBE32C84C16F}" type="datetimeFigureOut">
               <a:rPr lang="fr-FR" smtClean="0"/>
               <a:pPr/>
-              <a:t>29/08/2026</a:t>
+              <a:t>04/09/2026</a:t>
             </a:fld>
             <a:endParaRPr lang="fr-FR"/>
           </a:p>
@@ -1909,7 +1910,7 @@
     </p:spTree>
     <p:extLst>
       <p:ext uri="{BB962C8B-B14F-4D97-AF65-F5344CB8AC3E}">
-        <p14:creationId xmlns="" xmlns:p14="http://schemas.microsoft.com/office/powerpoint/2010/main" val="3989902220"/>
+        <p14:creationId xmlns:p14="http://schemas.microsoft.com/office/powerpoint/2010/main" xmlns="" val="3989902220"/>
       </p:ext>
     </p:extLst>
   </p:cSld>
@@ -2136,7 +2137,7 @@
             <a:fld id="{4EA84CA3-116E-4ABF-8AA6-EBE32C84C16F}" type="datetimeFigureOut">
               <a:rPr lang="fr-FR" smtClean="0"/>
               <a:pPr/>
-              <a:t>29/08/2026</a:t>
+              <a:t>04/09/2026</a:t>
             </a:fld>
             <a:endParaRPr lang="fr-FR"/>
           </a:p>
@@ -2188,7 +2189,7 @@
     </p:spTree>
     <p:extLst>
       <p:ext uri="{BB962C8B-B14F-4D97-AF65-F5344CB8AC3E}">
-        <p14:creationId xmlns="" xmlns:p14="http://schemas.microsoft.com/office/powerpoint/2010/main" val="1997102884"/>
+        <p14:creationId xmlns:p14="http://schemas.microsoft.com/office/powerpoint/2010/main" xmlns="" val="1997102884"/>
       </p:ext>
     </p:extLst>
   </p:cSld>
@@ -2391,7 +2392,7 @@
             <a:fld id="{4EA84CA3-116E-4ABF-8AA6-EBE32C84C16F}" type="datetimeFigureOut">
               <a:rPr lang="fr-FR" smtClean="0"/>
               <a:pPr/>
-              <a:t>29/08/2026</a:t>
+              <a:t>04/09/2026</a:t>
             </a:fld>
             <a:endParaRPr lang="fr-FR"/>
           </a:p>
@@ -2443,7 +2444,7 @@
     </p:spTree>
     <p:extLst>
       <p:ext uri="{BB962C8B-B14F-4D97-AF65-F5344CB8AC3E}">
-        <p14:creationId xmlns="" xmlns:p14="http://schemas.microsoft.com/office/powerpoint/2010/main" val="3738991770"/>
+        <p14:creationId xmlns:p14="http://schemas.microsoft.com/office/powerpoint/2010/main" xmlns="" val="3738991770"/>
       </p:ext>
     </p:extLst>
   </p:cSld>
@@ -2606,7 +2607,7 @@
             <a:fld id="{4EA84CA3-116E-4ABF-8AA6-EBE32C84C16F}" type="datetimeFigureOut">
               <a:rPr lang="fr-FR" smtClean="0"/>
               <a:pPr/>
-              <a:t>29/08/2026</a:t>
+              <a:t>04/09/2026</a:t>
             </a:fld>
             <a:endParaRPr lang="fr-FR"/>
           </a:p>
@@ -2694,7 +2695,7 @@
     </p:spTree>
     <p:extLst>
       <p:ext uri="{BB962C8B-B14F-4D97-AF65-F5344CB8AC3E}">
-        <p14:creationId xmlns="" xmlns:p14="http://schemas.microsoft.com/office/powerpoint/2010/main" val="4265157320"/>
+        <p14:creationId xmlns:p14="http://schemas.microsoft.com/office/powerpoint/2010/main" xmlns="" val="4265157320"/>
       </p:ext>
     </p:extLst>
   </p:cSld>
@@ -3797,9 +3798,1645 @@
     </p:spTree>
     <p:extLst>
       <p:ext uri="{BB962C8B-B14F-4D97-AF65-F5344CB8AC3E}">
-        <p14:creationId xmlns="" xmlns:p14="http://schemas.microsoft.com/office/powerpoint/2010/main" val="3760226372"/>
+        <p14:creationId xmlns:p14="http://schemas.microsoft.com/office/powerpoint/2010/main" xmlns="" val="3760226372"/>
       </p:ext>
     </p:extLst>
+  </p:cSld>
+  <p:clrMapOvr>
+    <a:masterClrMapping/>
+  </p:clrMapOvr>
+  <p:timing>
+    <p:tnLst>
+      <p:par>
+        <p:cTn id="1" dur="indefinite" restart="never" nodeType="tmRoot"/>
+      </p:par>
+    </p:tnLst>
+  </p:timing>
+</p:sld>
+</file>
+
+<file path=ppt/slides/slide10.xml><?xml version="1.0" encoding="utf-8"?>
+<p:sld xmlns:a="http://schemas.openxmlformats.org/drawingml/2006/main" xmlns:r="http://schemas.openxmlformats.org/officeDocument/2006/relationships" xmlns:p="http://schemas.openxmlformats.org/presentationml/2006/main">
+  <p:cSld>
+    <p:spTree>
+      <p:nvGrpSpPr>
+        <p:cNvPr id="1" name=""/>
+        <p:cNvGrpSpPr/>
+        <p:nvPr/>
+      </p:nvGrpSpPr>
+      <p:grpSpPr>
+        <a:xfrm>
+          <a:off x="0" y="0"/>
+          <a:ext cx="0" cy="0"/>
+          <a:chOff x="0" y="0"/>
+          <a:chExt cx="0" cy="0"/>
+        </a:xfrm>
+      </p:grpSpPr>
+      <p:pic>
+        <p:nvPicPr>
+          <p:cNvPr id="1026" name="Picture 2"/>
+          <p:cNvPicPr>
+            <a:picLocks noChangeAspect="1" noChangeArrowheads="1"/>
+          </p:cNvPicPr>
+          <p:nvPr/>
+        </p:nvPicPr>
+        <p:blipFill>
+          <a:blip r:embed="rId2" cstate="print"/>
+          <a:srcRect/>
+          <a:stretch>
+            <a:fillRect/>
+          </a:stretch>
+        </p:blipFill>
+        <p:spPr bwMode="auto">
+          <a:xfrm>
+            <a:off x="3921162" y="227207"/>
+            <a:ext cx="3812704" cy="6452374"/>
+          </a:xfrm>
+          <a:prstGeom prst="rect">
+            <a:avLst/>
+          </a:prstGeom>
+          <a:noFill/>
+          <a:ln w="9525">
+            <a:noFill/>
+            <a:miter lim="800000"/>
+            <a:headEnd/>
+            <a:tailEnd/>
+          </a:ln>
+          <a:effectLst/>
+        </p:spPr>
+      </p:pic>
+      <p:sp>
+        <p:nvSpPr>
+          <p:cNvPr id="6" name="ZoneTexte 5"/>
+          <p:cNvSpPr txBox="1"/>
+          <p:nvPr/>
+        </p:nvSpPr>
+        <p:spPr>
+          <a:xfrm>
+            <a:off x="3222667" y="3111190"/>
+            <a:ext cx="546410" cy="369332"/>
+          </a:xfrm>
+          <a:prstGeom prst="rect">
+            <a:avLst/>
+          </a:prstGeom>
+          <a:noFill/>
+        </p:spPr>
+        <p:txBody>
+          <a:bodyPr wrap="square" rtlCol="0">
+            <a:spAutoFit/>
+          </a:bodyPr>
+          <a:lstStyle/>
+          <a:p>
+            <a:r>
+              <a:rPr lang="fr-FR" dirty="0" smtClean="0">
+                <a:solidFill>
+                  <a:srgbClr val="FF0000"/>
+                </a:solidFill>
+              </a:rPr>
+              <a:t>A0</a:t>
+            </a:r>
+            <a:endParaRPr lang="fr-FR" dirty="0">
+              <a:solidFill>
+                <a:srgbClr val="FF0000"/>
+              </a:solidFill>
+            </a:endParaRPr>
+          </a:p>
+        </p:txBody>
+      </p:sp>
+      <p:sp>
+        <p:nvSpPr>
+          <p:cNvPr id="7" name="ZoneTexte 6"/>
+          <p:cNvSpPr txBox="1"/>
+          <p:nvPr/>
+        </p:nvSpPr>
+        <p:spPr>
+          <a:xfrm>
+            <a:off x="3230103" y="2828693"/>
+            <a:ext cx="546410" cy="369332"/>
+          </a:xfrm>
+          <a:prstGeom prst="rect">
+            <a:avLst/>
+          </a:prstGeom>
+          <a:noFill/>
+        </p:spPr>
+        <p:txBody>
+          <a:bodyPr wrap="square" rtlCol="0">
+            <a:spAutoFit/>
+          </a:bodyPr>
+          <a:lstStyle/>
+          <a:p>
+            <a:r>
+              <a:rPr lang="fr-FR" dirty="0" smtClean="0">
+                <a:solidFill>
+                  <a:srgbClr val="FF0000"/>
+                </a:solidFill>
+              </a:rPr>
+              <a:t>A1</a:t>
+            </a:r>
+            <a:endParaRPr lang="fr-FR" dirty="0">
+              <a:solidFill>
+                <a:srgbClr val="FF0000"/>
+              </a:solidFill>
+            </a:endParaRPr>
+          </a:p>
+        </p:txBody>
+      </p:sp>
+      <p:sp>
+        <p:nvSpPr>
+          <p:cNvPr id="8" name="ZoneTexte 7"/>
+          <p:cNvSpPr txBox="1"/>
+          <p:nvPr/>
+        </p:nvSpPr>
+        <p:spPr>
+          <a:xfrm>
+            <a:off x="3230102" y="2538762"/>
+            <a:ext cx="546410" cy="369332"/>
+          </a:xfrm>
+          <a:prstGeom prst="rect">
+            <a:avLst/>
+          </a:prstGeom>
+          <a:noFill/>
+        </p:spPr>
+        <p:txBody>
+          <a:bodyPr wrap="square" rtlCol="0">
+            <a:spAutoFit/>
+          </a:bodyPr>
+          <a:lstStyle/>
+          <a:p>
+            <a:r>
+              <a:rPr lang="fr-FR" dirty="0" smtClean="0">
+                <a:solidFill>
+                  <a:srgbClr val="FF0000"/>
+                </a:solidFill>
+              </a:rPr>
+              <a:t>A2</a:t>
+            </a:r>
+          </a:p>
+        </p:txBody>
+      </p:sp>
+      <p:sp>
+        <p:nvSpPr>
+          <p:cNvPr id="9" name="ZoneTexte 8"/>
+          <p:cNvSpPr txBox="1"/>
+          <p:nvPr/>
+        </p:nvSpPr>
+        <p:spPr>
+          <a:xfrm>
+            <a:off x="3230102" y="2293434"/>
+            <a:ext cx="546410" cy="369332"/>
+          </a:xfrm>
+          <a:prstGeom prst="rect">
+            <a:avLst/>
+          </a:prstGeom>
+          <a:noFill/>
+        </p:spPr>
+        <p:txBody>
+          <a:bodyPr wrap="square" rtlCol="0">
+            <a:spAutoFit/>
+          </a:bodyPr>
+          <a:lstStyle/>
+          <a:p>
+            <a:r>
+              <a:rPr lang="fr-FR" dirty="0" smtClean="0">
+                <a:solidFill>
+                  <a:srgbClr val="FF0000"/>
+                </a:solidFill>
+              </a:rPr>
+              <a:t>A3</a:t>
+            </a:r>
+            <a:endParaRPr lang="fr-FR" dirty="0">
+              <a:solidFill>
+                <a:srgbClr val="FF0000"/>
+              </a:solidFill>
+            </a:endParaRPr>
+          </a:p>
+        </p:txBody>
+      </p:sp>
+      <p:sp>
+        <p:nvSpPr>
+          <p:cNvPr id="10" name="ZoneTexte 9"/>
+          <p:cNvSpPr txBox="1"/>
+          <p:nvPr/>
+        </p:nvSpPr>
+        <p:spPr>
+          <a:xfrm>
+            <a:off x="3230100" y="1992351"/>
+            <a:ext cx="546410" cy="369332"/>
+          </a:xfrm>
+          <a:prstGeom prst="rect">
+            <a:avLst/>
+          </a:prstGeom>
+          <a:noFill/>
+        </p:spPr>
+        <p:txBody>
+          <a:bodyPr wrap="square" rtlCol="0">
+            <a:spAutoFit/>
+          </a:bodyPr>
+          <a:lstStyle/>
+          <a:p>
+            <a:r>
+              <a:rPr lang="fr-FR" dirty="0" smtClean="0">
+                <a:solidFill>
+                  <a:srgbClr val="FF0000"/>
+                </a:solidFill>
+              </a:rPr>
+              <a:t>A4</a:t>
+            </a:r>
+            <a:endParaRPr lang="fr-FR" dirty="0">
+              <a:solidFill>
+                <a:srgbClr val="FF0000"/>
+              </a:solidFill>
+            </a:endParaRPr>
+          </a:p>
+        </p:txBody>
+      </p:sp>
+      <p:sp>
+        <p:nvSpPr>
+          <p:cNvPr id="11" name="ZoneTexte 10"/>
+          <p:cNvSpPr txBox="1"/>
+          <p:nvPr/>
+        </p:nvSpPr>
+        <p:spPr>
+          <a:xfrm>
+            <a:off x="3230101" y="1724721"/>
+            <a:ext cx="546410" cy="369332"/>
+          </a:xfrm>
+          <a:prstGeom prst="rect">
+            <a:avLst/>
+          </a:prstGeom>
+          <a:noFill/>
+        </p:spPr>
+        <p:txBody>
+          <a:bodyPr wrap="square" rtlCol="0">
+            <a:spAutoFit/>
+          </a:bodyPr>
+          <a:lstStyle/>
+          <a:p>
+            <a:r>
+              <a:rPr lang="fr-FR" dirty="0" smtClean="0">
+                <a:solidFill>
+                  <a:srgbClr val="FF0000"/>
+                </a:solidFill>
+              </a:rPr>
+              <a:t>A5</a:t>
+            </a:r>
+            <a:endParaRPr lang="fr-FR" dirty="0">
+              <a:solidFill>
+                <a:srgbClr val="FF0000"/>
+              </a:solidFill>
+            </a:endParaRPr>
+          </a:p>
+        </p:txBody>
+      </p:sp>
+      <p:sp>
+        <p:nvSpPr>
+          <p:cNvPr id="12" name="ZoneTexte 11"/>
+          <p:cNvSpPr txBox="1"/>
+          <p:nvPr/>
+        </p:nvSpPr>
+        <p:spPr>
+          <a:xfrm>
+            <a:off x="3226384" y="1464525"/>
+            <a:ext cx="546410" cy="369332"/>
+          </a:xfrm>
+          <a:prstGeom prst="rect">
+            <a:avLst/>
+          </a:prstGeom>
+          <a:noFill/>
+        </p:spPr>
+        <p:txBody>
+          <a:bodyPr wrap="square" rtlCol="0">
+            <a:spAutoFit/>
+          </a:bodyPr>
+          <a:lstStyle/>
+          <a:p>
+            <a:r>
+              <a:rPr lang="fr-FR" dirty="0" smtClean="0">
+                <a:solidFill>
+                  <a:srgbClr val="FF0000"/>
+                </a:solidFill>
+              </a:rPr>
+              <a:t>A6</a:t>
+            </a:r>
+            <a:endParaRPr lang="fr-FR" dirty="0">
+              <a:solidFill>
+                <a:srgbClr val="FF0000"/>
+              </a:solidFill>
+            </a:endParaRPr>
+          </a:p>
+        </p:txBody>
+      </p:sp>
+      <p:sp>
+        <p:nvSpPr>
+          <p:cNvPr id="13" name="ZoneTexte 12"/>
+          <p:cNvSpPr txBox="1"/>
+          <p:nvPr/>
+        </p:nvSpPr>
+        <p:spPr>
+          <a:xfrm>
+            <a:off x="3237536" y="1196898"/>
+            <a:ext cx="546410" cy="369332"/>
+          </a:xfrm>
+          <a:prstGeom prst="rect">
+            <a:avLst/>
+          </a:prstGeom>
+          <a:noFill/>
+        </p:spPr>
+        <p:txBody>
+          <a:bodyPr wrap="square" rtlCol="0">
+            <a:spAutoFit/>
+          </a:bodyPr>
+          <a:lstStyle/>
+          <a:p>
+            <a:r>
+              <a:rPr lang="fr-FR" dirty="0" smtClean="0">
+                <a:solidFill>
+                  <a:srgbClr val="FF0000"/>
+                </a:solidFill>
+              </a:rPr>
+              <a:t>A7</a:t>
+            </a:r>
+            <a:endParaRPr lang="fr-FR" dirty="0">
+              <a:solidFill>
+                <a:srgbClr val="FF0000"/>
+              </a:solidFill>
+            </a:endParaRPr>
+          </a:p>
+        </p:txBody>
+      </p:sp>
+      <p:sp>
+        <p:nvSpPr>
+          <p:cNvPr id="14" name="ZoneTexte 13"/>
+          <p:cNvSpPr txBox="1"/>
+          <p:nvPr/>
+        </p:nvSpPr>
+        <p:spPr>
+          <a:xfrm>
+            <a:off x="7764919" y="840057"/>
+            <a:ext cx="546410" cy="369332"/>
+          </a:xfrm>
+          <a:prstGeom prst="rect">
+            <a:avLst/>
+          </a:prstGeom>
+          <a:noFill/>
+        </p:spPr>
+        <p:txBody>
+          <a:bodyPr wrap="square" rtlCol="0">
+            <a:spAutoFit/>
+          </a:bodyPr>
+          <a:lstStyle/>
+          <a:p>
+            <a:r>
+              <a:rPr lang="fr-FR" dirty="0" smtClean="0">
+                <a:solidFill>
+                  <a:srgbClr val="FF0000"/>
+                </a:solidFill>
+              </a:rPr>
+              <a:t>A8</a:t>
+            </a:r>
+            <a:endParaRPr lang="fr-FR" dirty="0">
+              <a:solidFill>
+                <a:srgbClr val="FF0000"/>
+              </a:solidFill>
+            </a:endParaRPr>
+          </a:p>
+        </p:txBody>
+      </p:sp>
+      <p:sp>
+        <p:nvSpPr>
+          <p:cNvPr id="16" name="ZoneTexte 15"/>
+          <p:cNvSpPr txBox="1"/>
+          <p:nvPr/>
+        </p:nvSpPr>
+        <p:spPr>
+          <a:xfrm>
+            <a:off x="7772356" y="1115122"/>
+            <a:ext cx="546410" cy="369332"/>
+          </a:xfrm>
+          <a:prstGeom prst="rect">
+            <a:avLst/>
+          </a:prstGeom>
+          <a:noFill/>
+        </p:spPr>
+        <p:txBody>
+          <a:bodyPr wrap="square" rtlCol="0">
+            <a:spAutoFit/>
+          </a:bodyPr>
+          <a:lstStyle/>
+          <a:p>
+            <a:r>
+              <a:rPr lang="fr-FR" dirty="0" smtClean="0">
+                <a:solidFill>
+                  <a:srgbClr val="FF0000"/>
+                </a:solidFill>
+              </a:rPr>
+              <a:t>A9</a:t>
+            </a:r>
+            <a:endParaRPr lang="fr-FR" dirty="0">
+              <a:solidFill>
+                <a:srgbClr val="FF0000"/>
+              </a:solidFill>
+            </a:endParaRPr>
+          </a:p>
+        </p:txBody>
+      </p:sp>
+      <p:sp>
+        <p:nvSpPr>
+          <p:cNvPr id="17" name="ZoneTexte 16"/>
+          <p:cNvSpPr txBox="1"/>
+          <p:nvPr/>
+        </p:nvSpPr>
+        <p:spPr>
+          <a:xfrm>
+            <a:off x="7761203" y="1393902"/>
+            <a:ext cx="747130" cy="369332"/>
+          </a:xfrm>
+          <a:prstGeom prst="rect">
+            <a:avLst/>
+          </a:prstGeom>
+          <a:noFill/>
+        </p:spPr>
+        <p:txBody>
+          <a:bodyPr wrap="square" rtlCol="0">
+            <a:spAutoFit/>
+          </a:bodyPr>
+          <a:lstStyle/>
+          <a:p>
+            <a:r>
+              <a:rPr lang="fr-FR" dirty="0" smtClean="0">
+                <a:solidFill>
+                  <a:srgbClr val="FF0000"/>
+                </a:solidFill>
+              </a:rPr>
+              <a:t>A10</a:t>
+            </a:r>
+          </a:p>
+        </p:txBody>
+      </p:sp>
+      <p:sp>
+        <p:nvSpPr>
+          <p:cNvPr id="18" name="ZoneTexte 17"/>
+          <p:cNvSpPr txBox="1"/>
+          <p:nvPr/>
+        </p:nvSpPr>
+        <p:spPr>
+          <a:xfrm>
+            <a:off x="7757485" y="1680115"/>
+            <a:ext cx="747130" cy="369332"/>
+          </a:xfrm>
+          <a:prstGeom prst="rect">
+            <a:avLst/>
+          </a:prstGeom>
+          <a:noFill/>
+        </p:spPr>
+        <p:txBody>
+          <a:bodyPr wrap="square" rtlCol="0">
+            <a:spAutoFit/>
+          </a:bodyPr>
+          <a:lstStyle/>
+          <a:p>
+            <a:r>
+              <a:rPr lang="fr-FR" dirty="0" smtClean="0">
+                <a:solidFill>
+                  <a:srgbClr val="FF0000"/>
+                </a:solidFill>
+              </a:rPr>
+              <a:t>A11</a:t>
+            </a:r>
+          </a:p>
+        </p:txBody>
+      </p:sp>
+      <p:sp>
+        <p:nvSpPr>
+          <p:cNvPr id="19" name="ZoneTexte 18"/>
+          <p:cNvSpPr txBox="1"/>
+          <p:nvPr/>
+        </p:nvSpPr>
+        <p:spPr>
+          <a:xfrm>
+            <a:off x="7757486" y="1958895"/>
+            <a:ext cx="747130" cy="369332"/>
+          </a:xfrm>
+          <a:prstGeom prst="rect">
+            <a:avLst/>
+          </a:prstGeom>
+          <a:noFill/>
+        </p:spPr>
+        <p:txBody>
+          <a:bodyPr wrap="square" rtlCol="0">
+            <a:spAutoFit/>
+          </a:bodyPr>
+          <a:lstStyle/>
+          <a:p>
+            <a:r>
+              <a:rPr lang="fr-FR" dirty="0" smtClean="0">
+                <a:solidFill>
+                  <a:srgbClr val="FF0000"/>
+                </a:solidFill>
+              </a:rPr>
+              <a:t>A12</a:t>
+            </a:r>
+          </a:p>
+        </p:txBody>
+      </p:sp>
+      <p:sp>
+        <p:nvSpPr>
+          <p:cNvPr id="20" name="ZoneTexte 19"/>
+          <p:cNvSpPr txBox="1"/>
+          <p:nvPr/>
+        </p:nvSpPr>
+        <p:spPr>
+          <a:xfrm>
+            <a:off x="7746335" y="2215375"/>
+            <a:ext cx="747130" cy="369332"/>
+          </a:xfrm>
+          <a:prstGeom prst="rect">
+            <a:avLst/>
+          </a:prstGeom>
+          <a:noFill/>
+        </p:spPr>
+        <p:txBody>
+          <a:bodyPr wrap="square" rtlCol="0">
+            <a:spAutoFit/>
+          </a:bodyPr>
+          <a:lstStyle/>
+          <a:p>
+            <a:r>
+              <a:rPr lang="fr-FR" dirty="0" smtClean="0">
+                <a:solidFill>
+                  <a:srgbClr val="FF0000"/>
+                </a:solidFill>
+              </a:rPr>
+              <a:t>A13</a:t>
+            </a:r>
+          </a:p>
+        </p:txBody>
+      </p:sp>
+      <p:sp>
+        <p:nvSpPr>
+          <p:cNvPr id="21" name="ZoneTexte 20"/>
+          <p:cNvSpPr txBox="1"/>
+          <p:nvPr/>
+        </p:nvSpPr>
+        <p:spPr>
+          <a:xfrm>
+            <a:off x="7746333" y="2516457"/>
+            <a:ext cx="747130" cy="369332"/>
+          </a:xfrm>
+          <a:prstGeom prst="rect">
+            <a:avLst/>
+          </a:prstGeom>
+          <a:noFill/>
+        </p:spPr>
+        <p:txBody>
+          <a:bodyPr wrap="square" rtlCol="0">
+            <a:spAutoFit/>
+          </a:bodyPr>
+          <a:lstStyle/>
+          <a:p>
+            <a:r>
+              <a:rPr lang="fr-FR" dirty="0" smtClean="0">
+                <a:solidFill>
+                  <a:srgbClr val="FF0000"/>
+                </a:solidFill>
+              </a:rPr>
+              <a:t>A14</a:t>
+            </a:r>
+          </a:p>
+        </p:txBody>
+      </p:sp>
+      <p:sp>
+        <p:nvSpPr>
+          <p:cNvPr id="22" name="ZoneTexte 21"/>
+          <p:cNvSpPr txBox="1"/>
+          <p:nvPr/>
+        </p:nvSpPr>
+        <p:spPr>
+          <a:xfrm>
+            <a:off x="7746335" y="2772935"/>
+            <a:ext cx="747130" cy="369332"/>
+          </a:xfrm>
+          <a:prstGeom prst="rect">
+            <a:avLst/>
+          </a:prstGeom>
+          <a:noFill/>
+        </p:spPr>
+        <p:txBody>
+          <a:bodyPr wrap="square" rtlCol="0">
+            <a:spAutoFit/>
+          </a:bodyPr>
+          <a:lstStyle/>
+          <a:p>
+            <a:r>
+              <a:rPr lang="fr-FR" dirty="0" smtClean="0">
+                <a:solidFill>
+                  <a:srgbClr val="FF0000"/>
+                </a:solidFill>
+              </a:rPr>
+              <a:t>A15</a:t>
+            </a:r>
+          </a:p>
+        </p:txBody>
+      </p:sp>
+      <p:sp>
+        <p:nvSpPr>
+          <p:cNvPr id="23" name="ZoneTexte 22"/>
+          <p:cNvSpPr txBox="1"/>
+          <p:nvPr/>
+        </p:nvSpPr>
+        <p:spPr>
+          <a:xfrm>
+            <a:off x="7731468" y="3047998"/>
+            <a:ext cx="747130" cy="369332"/>
+          </a:xfrm>
+          <a:prstGeom prst="rect">
+            <a:avLst/>
+          </a:prstGeom>
+          <a:noFill/>
+        </p:spPr>
+        <p:txBody>
+          <a:bodyPr wrap="square" rtlCol="0">
+            <a:spAutoFit/>
+          </a:bodyPr>
+          <a:lstStyle/>
+          <a:p>
+            <a:r>
+              <a:rPr lang="fr-FR" dirty="0" smtClean="0">
+                <a:solidFill>
+                  <a:srgbClr val="FF0000"/>
+                </a:solidFill>
+              </a:rPr>
+              <a:t>D49</a:t>
+            </a:r>
+          </a:p>
+        </p:txBody>
+      </p:sp>
+      <p:sp>
+        <p:nvSpPr>
+          <p:cNvPr id="24" name="ZoneTexte 23"/>
+          <p:cNvSpPr txBox="1"/>
+          <p:nvPr/>
+        </p:nvSpPr>
+        <p:spPr>
+          <a:xfrm>
+            <a:off x="3233814" y="925548"/>
+            <a:ext cx="669076" cy="369332"/>
+          </a:xfrm>
+          <a:prstGeom prst="rect">
+            <a:avLst/>
+          </a:prstGeom>
+          <a:noFill/>
+        </p:spPr>
+        <p:txBody>
+          <a:bodyPr wrap="square" rtlCol="0">
+            <a:spAutoFit/>
+          </a:bodyPr>
+          <a:lstStyle/>
+          <a:p>
+            <a:r>
+              <a:rPr lang="fr-FR" dirty="0" smtClean="0">
+                <a:solidFill>
+                  <a:srgbClr val="FF0000"/>
+                </a:solidFill>
+              </a:rPr>
+              <a:t>D48</a:t>
+            </a:r>
+          </a:p>
+        </p:txBody>
+      </p:sp>
+      <p:sp>
+        <p:nvSpPr>
+          <p:cNvPr id="25" name="ZoneTexte 24"/>
+          <p:cNvSpPr txBox="1"/>
+          <p:nvPr/>
+        </p:nvSpPr>
+        <p:spPr>
+          <a:xfrm>
+            <a:off x="3241248" y="620749"/>
+            <a:ext cx="669076" cy="369332"/>
+          </a:xfrm>
+          <a:prstGeom prst="rect">
+            <a:avLst/>
+          </a:prstGeom>
+          <a:noFill/>
+        </p:spPr>
+        <p:txBody>
+          <a:bodyPr wrap="square" rtlCol="0">
+            <a:spAutoFit/>
+          </a:bodyPr>
+          <a:lstStyle/>
+          <a:p>
+            <a:r>
+              <a:rPr lang="fr-FR" dirty="0" smtClean="0">
+                <a:solidFill>
+                  <a:srgbClr val="FF0000"/>
+                </a:solidFill>
+              </a:rPr>
+              <a:t>D47</a:t>
+            </a:r>
+          </a:p>
+        </p:txBody>
+      </p:sp>
+      <p:sp>
+        <p:nvSpPr>
+          <p:cNvPr id="26" name="ZoneTexte 25"/>
+          <p:cNvSpPr txBox="1"/>
+          <p:nvPr/>
+        </p:nvSpPr>
+        <p:spPr>
+          <a:xfrm>
+            <a:off x="7753771" y="572426"/>
+            <a:ext cx="669076" cy="369332"/>
+          </a:xfrm>
+          <a:prstGeom prst="rect">
+            <a:avLst/>
+          </a:prstGeom>
+          <a:noFill/>
+        </p:spPr>
+        <p:txBody>
+          <a:bodyPr wrap="square" rtlCol="0">
+            <a:spAutoFit/>
+          </a:bodyPr>
+          <a:lstStyle/>
+          <a:p>
+            <a:r>
+              <a:rPr lang="fr-FR" dirty="0" smtClean="0">
+                <a:solidFill>
+                  <a:srgbClr val="FF0000"/>
+                </a:solidFill>
+              </a:rPr>
+              <a:t>D46</a:t>
+            </a:r>
+          </a:p>
+        </p:txBody>
+      </p:sp>
+      <p:sp>
+        <p:nvSpPr>
+          <p:cNvPr id="27" name="ZoneTexte 26"/>
+          <p:cNvSpPr txBox="1"/>
+          <p:nvPr/>
+        </p:nvSpPr>
+        <p:spPr>
+          <a:xfrm>
+            <a:off x="7761206" y="301080"/>
+            <a:ext cx="669076" cy="369332"/>
+          </a:xfrm>
+          <a:prstGeom prst="rect">
+            <a:avLst/>
+          </a:prstGeom>
+          <a:noFill/>
+        </p:spPr>
+        <p:txBody>
+          <a:bodyPr wrap="square" rtlCol="0">
+            <a:spAutoFit/>
+          </a:bodyPr>
+          <a:lstStyle/>
+          <a:p>
+            <a:r>
+              <a:rPr lang="fr-FR" dirty="0" smtClean="0">
+                <a:solidFill>
+                  <a:srgbClr val="FF0000"/>
+                </a:solidFill>
+              </a:rPr>
+              <a:t>D45</a:t>
+            </a:r>
+          </a:p>
+        </p:txBody>
+      </p:sp>
+      <p:sp>
+        <p:nvSpPr>
+          <p:cNvPr id="28" name="ZoneTexte 27"/>
+          <p:cNvSpPr txBox="1"/>
+          <p:nvPr/>
+        </p:nvSpPr>
+        <p:spPr>
+          <a:xfrm>
+            <a:off x="7731472" y="3326778"/>
+            <a:ext cx="1055648" cy="369332"/>
+          </a:xfrm>
+          <a:prstGeom prst="rect">
+            <a:avLst/>
+          </a:prstGeom>
+          <a:noFill/>
+        </p:spPr>
+        <p:txBody>
+          <a:bodyPr wrap="square" rtlCol="0">
+            <a:spAutoFit/>
+          </a:bodyPr>
+          <a:lstStyle/>
+          <a:p>
+            <a:r>
+              <a:rPr lang="fr-FR" dirty="0" smtClean="0">
+                <a:solidFill>
+                  <a:srgbClr val="FF0000"/>
+                </a:solidFill>
+              </a:rPr>
+              <a:t>D6 (VCC)</a:t>
+            </a:r>
+          </a:p>
+        </p:txBody>
+      </p:sp>
+      <p:sp>
+        <p:nvSpPr>
+          <p:cNvPr id="29" name="ZoneTexte 28"/>
+          <p:cNvSpPr txBox="1"/>
+          <p:nvPr/>
+        </p:nvSpPr>
+        <p:spPr>
+          <a:xfrm>
+            <a:off x="3256117" y="323382"/>
+            <a:ext cx="557560" cy="369332"/>
+          </a:xfrm>
+          <a:prstGeom prst="rect">
+            <a:avLst/>
+          </a:prstGeom>
+          <a:noFill/>
+        </p:spPr>
+        <p:txBody>
+          <a:bodyPr wrap="square" rtlCol="0">
+            <a:spAutoFit/>
+          </a:bodyPr>
+          <a:lstStyle/>
+          <a:p>
+            <a:r>
+              <a:rPr lang="fr-FR" dirty="0" smtClean="0">
+                <a:solidFill>
+                  <a:srgbClr val="FF0000"/>
+                </a:solidFill>
+              </a:rPr>
+              <a:t>D7</a:t>
+            </a:r>
+          </a:p>
+        </p:txBody>
+      </p:sp>
+      <p:sp>
+        <p:nvSpPr>
+          <p:cNvPr id="30" name="ZoneTexte 29"/>
+          <p:cNvSpPr txBox="1"/>
+          <p:nvPr/>
+        </p:nvSpPr>
+        <p:spPr>
+          <a:xfrm>
+            <a:off x="3207796" y="3375100"/>
+            <a:ext cx="557560" cy="369332"/>
+          </a:xfrm>
+          <a:prstGeom prst="rect">
+            <a:avLst/>
+          </a:prstGeom>
+          <a:noFill/>
+        </p:spPr>
+        <p:txBody>
+          <a:bodyPr wrap="square" rtlCol="0">
+            <a:spAutoFit/>
+          </a:bodyPr>
+          <a:lstStyle/>
+          <a:p>
+            <a:r>
+              <a:rPr lang="fr-FR" dirty="0" smtClean="0">
+                <a:solidFill>
+                  <a:srgbClr val="FF0000"/>
+                </a:solidFill>
+              </a:rPr>
+              <a:t>D9</a:t>
+            </a:r>
+          </a:p>
+        </p:txBody>
+      </p:sp>
+      <p:sp>
+        <p:nvSpPr>
+          <p:cNvPr id="31" name="ZoneTexte 30"/>
+          <p:cNvSpPr txBox="1"/>
+          <p:nvPr/>
+        </p:nvSpPr>
+        <p:spPr>
+          <a:xfrm>
+            <a:off x="3215231" y="3917793"/>
+            <a:ext cx="557560" cy="369332"/>
+          </a:xfrm>
+          <a:prstGeom prst="rect">
+            <a:avLst/>
+          </a:prstGeom>
+          <a:noFill/>
+        </p:spPr>
+        <p:txBody>
+          <a:bodyPr wrap="square" rtlCol="0">
+            <a:spAutoFit/>
+          </a:bodyPr>
+          <a:lstStyle/>
+          <a:p>
+            <a:r>
+              <a:rPr lang="fr-FR" dirty="0" smtClean="0">
+                <a:solidFill>
+                  <a:srgbClr val="FF0000"/>
+                </a:solidFill>
+              </a:rPr>
+              <a:t>D6</a:t>
+            </a:r>
+          </a:p>
+        </p:txBody>
+      </p:sp>
+      <p:sp>
+        <p:nvSpPr>
+          <p:cNvPr id="32" name="ZoneTexte 31"/>
+          <p:cNvSpPr txBox="1"/>
+          <p:nvPr/>
+        </p:nvSpPr>
+        <p:spPr>
+          <a:xfrm>
+            <a:off x="3192929" y="3650164"/>
+            <a:ext cx="709958" cy="369332"/>
+          </a:xfrm>
+          <a:prstGeom prst="rect">
+            <a:avLst/>
+          </a:prstGeom>
+          <a:noFill/>
+        </p:spPr>
+        <p:txBody>
+          <a:bodyPr wrap="square" rtlCol="0">
+            <a:spAutoFit/>
+          </a:bodyPr>
+          <a:lstStyle/>
+          <a:p>
+            <a:r>
+              <a:rPr lang="fr-FR" dirty="0" smtClean="0">
+                <a:solidFill>
+                  <a:srgbClr val="FF0000"/>
+                </a:solidFill>
+              </a:rPr>
+              <a:t>GND</a:t>
+            </a:r>
+          </a:p>
+        </p:txBody>
+      </p:sp>
+      <p:sp>
+        <p:nvSpPr>
+          <p:cNvPr id="33" name="ZoneTexte 32"/>
+          <p:cNvSpPr txBox="1"/>
+          <p:nvPr/>
+        </p:nvSpPr>
+        <p:spPr>
+          <a:xfrm>
+            <a:off x="7727758" y="3590691"/>
+            <a:ext cx="709958" cy="369332"/>
+          </a:xfrm>
+          <a:prstGeom prst="rect">
+            <a:avLst/>
+          </a:prstGeom>
+          <a:noFill/>
+        </p:spPr>
+        <p:txBody>
+          <a:bodyPr wrap="square" rtlCol="0">
+            <a:spAutoFit/>
+          </a:bodyPr>
+          <a:lstStyle/>
+          <a:p>
+            <a:r>
+              <a:rPr lang="fr-FR" dirty="0" smtClean="0">
+                <a:solidFill>
+                  <a:srgbClr val="FF0000"/>
+                </a:solidFill>
+              </a:rPr>
+              <a:t>GND</a:t>
+            </a:r>
+          </a:p>
+        </p:txBody>
+      </p:sp>
+      <p:sp>
+        <p:nvSpPr>
+          <p:cNvPr id="34" name="ZoneTexte 33"/>
+          <p:cNvSpPr txBox="1"/>
+          <p:nvPr/>
+        </p:nvSpPr>
+        <p:spPr>
+          <a:xfrm>
+            <a:off x="7761212" y="3880622"/>
+            <a:ext cx="709958" cy="369332"/>
+          </a:xfrm>
+          <a:prstGeom prst="rect">
+            <a:avLst/>
+          </a:prstGeom>
+          <a:noFill/>
+        </p:spPr>
+        <p:txBody>
+          <a:bodyPr wrap="square" rtlCol="0">
+            <a:spAutoFit/>
+          </a:bodyPr>
+          <a:lstStyle/>
+          <a:p>
+            <a:r>
+              <a:rPr lang="fr-FR" dirty="0" smtClean="0">
+                <a:solidFill>
+                  <a:srgbClr val="FF0000"/>
+                </a:solidFill>
+              </a:rPr>
+              <a:t>D29</a:t>
+            </a:r>
+          </a:p>
+        </p:txBody>
+      </p:sp>
+      <p:sp>
+        <p:nvSpPr>
+          <p:cNvPr id="35" name="ZoneTexte 34"/>
+          <p:cNvSpPr txBox="1"/>
+          <p:nvPr/>
+        </p:nvSpPr>
+        <p:spPr>
+          <a:xfrm>
+            <a:off x="7768646" y="4401013"/>
+            <a:ext cx="709958" cy="369332"/>
+          </a:xfrm>
+          <a:prstGeom prst="rect">
+            <a:avLst/>
+          </a:prstGeom>
+          <a:noFill/>
+        </p:spPr>
+        <p:txBody>
+          <a:bodyPr wrap="square" rtlCol="0">
+            <a:spAutoFit/>
+          </a:bodyPr>
+          <a:lstStyle/>
+          <a:p>
+            <a:r>
+              <a:rPr lang="fr-FR" dirty="0" smtClean="0">
+                <a:solidFill>
+                  <a:srgbClr val="FF0000"/>
+                </a:solidFill>
+              </a:rPr>
+              <a:t>D28</a:t>
+            </a:r>
+          </a:p>
+        </p:txBody>
+      </p:sp>
+      <p:sp>
+        <p:nvSpPr>
+          <p:cNvPr id="36" name="ZoneTexte 35"/>
+          <p:cNvSpPr txBox="1"/>
+          <p:nvPr/>
+        </p:nvSpPr>
+        <p:spPr>
+          <a:xfrm>
+            <a:off x="7779800" y="4947422"/>
+            <a:ext cx="709958" cy="369332"/>
+          </a:xfrm>
+          <a:prstGeom prst="rect">
+            <a:avLst/>
+          </a:prstGeom>
+          <a:noFill/>
+        </p:spPr>
+        <p:txBody>
+          <a:bodyPr wrap="square" rtlCol="0">
+            <a:spAutoFit/>
+          </a:bodyPr>
+          <a:lstStyle/>
+          <a:p>
+            <a:r>
+              <a:rPr lang="fr-FR" dirty="0" smtClean="0">
+                <a:solidFill>
+                  <a:srgbClr val="FF0000"/>
+                </a:solidFill>
+              </a:rPr>
+              <a:t>D27</a:t>
+            </a:r>
+          </a:p>
+        </p:txBody>
+      </p:sp>
+      <p:sp>
+        <p:nvSpPr>
+          <p:cNvPr id="37" name="ZoneTexte 36"/>
+          <p:cNvSpPr txBox="1"/>
+          <p:nvPr/>
+        </p:nvSpPr>
+        <p:spPr>
+          <a:xfrm>
+            <a:off x="7776084" y="5545871"/>
+            <a:ext cx="709958" cy="369332"/>
+          </a:xfrm>
+          <a:prstGeom prst="rect">
+            <a:avLst/>
+          </a:prstGeom>
+          <a:noFill/>
+        </p:spPr>
+        <p:txBody>
+          <a:bodyPr wrap="square" rtlCol="0">
+            <a:spAutoFit/>
+          </a:bodyPr>
+          <a:lstStyle/>
+          <a:p>
+            <a:r>
+              <a:rPr lang="fr-FR" dirty="0" smtClean="0">
+                <a:solidFill>
+                  <a:srgbClr val="FF0000"/>
+                </a:solidFill>
+              </a:rPr>
+              <a:t>D26</a:t>
+            </a:r>
+          </a:p>
+        </p:txBody>
+      </p:sp>
+      <p:sp>
+        <p:nvSpPr>
+          <p:cNvPr id="38" name="ZoneTexte 37"/>
+          <p:cNvSpPr txBox="1"/>
+          <p:nvPr/>
+        </p:nvSpPr>
+        <p:spPr>
+          <a:xfrm>
+            <a:off x="3226383" y="6114583"/>
+            <a:ext cx="709958" cy="369332"/>
+          </a:xfrm>
+          <a:prstGeom prst="rect">
+            <a:avLst/>
+          </a:prstGeom>
+          <a:noFill/>
+        </p:spPr>
+        <p:txBody>
+          <a:bodyPr wrap="square" rtlCol="0">
+            <a:spAutoFit/>
+          </a:bodyPr>
+          <a:lstStyle/>
+          <a:p>
+            <a:r>
+              <a:rPr lang="fr-FR" dirty="0" smtClean="0">
+                <a:solidFill>
+                  <a:srgbClr val="FF0000"/>
+                </a:solidFill>
+              </a:rPr>
+              <a:t>D25</a:t>
+            </a:r>
+          </a:p>
+        </p:txBody>
+      </p:sp>
+      <p:sp>
+        <p:nvSpPr>
+          <p:cNvPr id="39" name="ZoneTexte 38"/>
+          <p:cNvSpPr txBox="1"/>
+          <p:nvPr/>
+        </p:nvSpPr>
+        <p:spPr>
+          <a:xfrm>
+            <a:off x="3233818" y="5564456"/>
+            <a:ext cx="709958" cy="369332"/>
+          </a:xfrm>
+          <a:prstGeom prst="rect">
+            <a:avLst/>
+          </a:prstGeom>
+          <a:noFill/>
+        </p:spPr>
+        <p:txBody>
+          <a:bodyPr wrap="square" rtlCol="0">
+            <a:spAutoFit/>
+          </a:bodyPr>
+          <a:lstStyle/>
+          <a:p>
+            <a:r>
+              <a:rPr lang="fr-FR" dirty="0" smtClean="0">
+                <a:solidFill>
+                  <a:srgbClr val="FF0000"/>
+                </a:solidFill>
+              </a:rPr>
+              <a:t>D24</a:t>
+            </a:r>
+          </a:p>
+        </p:txBody>
+      </p:sp>
+      <p:sp>
+        <p:nvSpPr>
+          <p:cNvPr id="40" name="ZoneTexte 39"/>
+          <p:cNvSpPr txBox="1"/>
+          <p:nvPr/>
+        </p:nvSpPr>
+        <p:spPr>
+          <a:xfrm>
+            <a:off x="3244969" y="5040348"/>
+            <a:ext cx="709958" cy="369332"/>
+          </a:xfrm>
+          <a:prstGeom prst="rect">
+            <a:avLst/>
+          </a:prstGeom>
+          <a:noFill/>
+        </p:spPr>
+        <p:txBody>
+          <a:bodyPr wrap="square" rtlCol="0">
+            <a:spAutoFit/>
+          </a:bodyPr>
+          <a:lstStyle/>
+          <a:p>
+            <a:r>
+              <a:rPr lang="fr-FR" dirty="0" smtClean="0">
+                <a:solidFill>
+                  <a:srgbClr val="FF0000"/>
+                </a:solidFill>
+              </a:rPr>
+              <a:t>D23</a:t>
+            </a:r>
+          </a:p>
+        </p:txBody>
+      </p:sp>
+      <p:sp>
+        <p:nvSpPr>
+          <p:cNvPr id="41" name="ZoneTexte 40"/>
+          <p:cNvSpPr txBox="1"/>
+          <p:nvPr/>
+        </p:nvSpPr>
+        <p:spPr>
+          <a:xfrm>
+            <a:off x="3237535" y="4508805"/>
+            <a:ext cx="709958" cy="369332"/>
+          </a:xfrm>
+          <a:prstGeom prst="rect">
+            <a:avLst/>
+          </a:prstGeom>
+          <a:noFill/>
+        </p:spPr>
+        <p:txBody>
+          <a:bodyPr wrap="square" rtlCol="0">
+            <a:spAutoFit/>
+          </a:bodyPr>
+          <a:lstStyle/>
+          <a:p>
+            <a:r>
+              <a:rPr lang="fr-FR" dirty="0" smtClean="0">
+                <a:solidFill>
+                  <a:srgbClr val="FF0000"/>
+                </a:solidFill>
+              </a:rPr>
+              <a:t>D22</a:t>
+            </a:r>
+          </a:p>
+        </p:txBody>
+      </p:sp>
+      <p:sp>
+        <p:nvSpPr>
+          <p:cNvPr id="42" name="ZoneTexte 41"/>
+          <p:cNvSpPr txBox="1"/>
+          <p:nvPr/>
+        </p:nvSpPr>
+        <p:spPr>
+          <a:xfrm>
+            <a:off x="7753779" y="4163121"/>
+            <a:ext cx="709958" cy="369332"/>
+          </a:xfrm>
+          <a:prstGeom prst="rect">
+            <a:avLst/>
+          </a:prstGeom>
+          <a:noFill/>
+        </p:spPr>
+        <p:txBody>
+          <a:bodyPr wrap="square" rtlCol="0">
+            <a:spAutoFit/>
+          </a:bodyPr>
+          <a:lstStyle/>
+          <a:p>
+            <a:r>
+              <a:rPr lang="fr-FR" dirty="0" smtClean="0">
+                <a:solidFill>
+                  <a:srgbClr val="FF0000"/>
+                </a:solidFill>
+              </a:rPr>
+              <a:t>D30</a:t>
+            </a:r>
+          </a:p>
+        </p:txBody>
+      </p:sp>
+      <p:sp>
+        <p:nvSpPr>
+          <p:cNvPr id="43" name="ZoneTexte 42"/>
+          <p:cNvSpPr txBox="1"/>
+          <p:nvPr/>
+        </p:nvSpPr>
+        <p:spPr>
+          <a:xfrm>
+            <a:off x="7772365" y="4672359"/>
+            <a:ext cx="709958" cy="369332"/>
+          </a:xfrm>
+          <a:prstGeom prst="rect">
+            <a:avLst/>
+          </a:prstGeom>
+          <a:noFill/>
+        </p:spPr>
+        <p:txBody>
+          <a:bodyPr wrap="square" rtlCol="0">
+            <a:spAutoFit/>
+          </a:bodyPr>
+          <a:lstStyle/>
+          <a:p>
+            <a:r>
+              <a:rPr lang="fr-FR" dirty="0" smtClean="0">
+                <a:solidFill>
+                  <a:srgbClr val="FF0000"/>
+                </a:solidFill>
+              </a:rPr>
+              <a:t>D31</a:t>
+            </a:r>
+          </a:p>
+        </p:txBody>
+      </p:sp>
+      <p:sp>
+        <p:nvSpPr>
+          <p:cNvPr id="44" name="ZoneTexte 43"/>
+          <p:cNvSpPr txBox="1"/>
+          <p:nvPr/>
+        </p:nvSpPr>
+        <p:spPr>
+          <a:xfrm>
+            <a:off x="7772366" y="5263374"/>
+            <a:ext cx="709958" cy="369332"/>
+          </a:xfrm>
+          <a:prstGeom prst="rect">
+            <a:avLst/>
+          </a:prstGeom>
+          <a:noFill/>
+        </p:spPr>
+        <p:txBody>
+          <a:bodyPr wrap="square" rtlCol="0">
+            <a:spAutoFit/>
+          </a:bodyPr>
+          <a:lstStyle/>
+          <a:p>
+            <a:r>
+              <a:rPr lang="fr-FR" dirty="0" smtClean="0">
+                <a:solidFill>
+                  <a:srgbClr val="FF0000"/>
+                </a:solidFill>
+              </a:rPr>
+              <a:t>D32</a:t>
+            </a:r>
+          </a:p>
+        </p:txBody>
+      </p:sp>
+      <p:sp>
+        <p:nvSpPr>
+          <p:cNvPr id="45" name="ZoneTexte 44"/>
+          <p:cNvSpPr txBox="1"/>
+          <p:nvPr/>
+        </p:nvSpPr>
+        <p:spPr>
+          <a:xfrm>
+            <a:off x="7779801" y="5817218"/>
+            <a:ext cx="709958" cy="369332"/>
+          </a:xfrm>
+          <a:prstGeom prst="rect">
+            <a:avLst/>
+          </a:prstGeom>
+          <a:noFill/>
+        </p:spPr>
+        <p:txBody>
+          <a:bodyPr wrap="square" rtlCol="0">
+            <a:spAutoFit/>
+          </a:bodyPr>
+          <a:lstStyle/>
+          <a:p>
+            <a:r>
+              <a:rPr lang="fr-FR" dirty="0" smtClean="0">
+                <a:solidFill>
+                  <a:srgbClr val="FF0000"/>
+                </a:solidFill>
+              </a:rPr>
+              <a:t>D33</a:t>
+            </a:r>
+          </a:p>
+        </p:txBody>
+      </p:sp>
+      <p:sp>
+        <p:nvSpPr>
+          <p:cNvPr id="46" name="ZoneTexte 45"/>
+          <p:cNvSpPr txBox="1"/>
+          <p:nvPr/>
+        </p:nvSpPr>
+        <p:spPr>
+          <a:xfrm>
+            <a:off x="3226386" y="5846955"/>
+            <a:ext cx="709958" cy="369332"/>
+          </a:xfrm>
+          <a:prstGeom prst="rect">
+            <a:avLst/>
+          </a:prstGeom>
+          <a:noFill/>
+        </p:spPr>
+        <p:txBody>
+          <a:bodyPr wrap="square" rtlCol="0">
+            <a:spAutoFit/>
+          </a:bodyPr>
+          <a:lstStyle/>
+          <a:p>
+            <a:r>
+              <a:rPr lang="fr-FR" dirty="0" smtClean="0">
+                <a:solidFill>
+                  <a:srgbClr val="FF0000"/>
+                </a:solidFill>
+              </a:rPr>
+              <a:t>D34</a:t>
+            </a:r>
+          </a:p>
+        </p:txBody>
+      </p:sp>
+      <p:sp>
+        <p:nvSpPr>
+          <p:cNvPr id="47" name="ZoneTexte 46"/>
+          <p:cNvSpPr txBox="1"/>
+          <p:nvPr/>
+        </p:nvSpPr>
+        <p:spPr>
+          <a:xfrm>
+            <a:off x="3244971" y="5296829"/>
+            <a:ext cx="709958" cy="369332"/>
+          </a:xfrm>
+          <a:prstGeom prst="rect">
+            <a:avLst/>
+          </a:prstGeom>
+          <a:noFill/>
+        </p:spPr>
+        <p:txBody>
+          <a:bodyPr wrap="square" rtlCol="0">
+            <a:spAutoFit/>
+          </a:bodyPr>
+          <a:lstStyle/>
+          <a:p>
+            <a:r>
+              <a:rPr lang="fr-FR" dirty="0" smtClean="0">
+                <a:solidFill>
+                  <a:srgbClr val="FF0000"/>
+                </a:solidFill>
+              </a:rPr>
+              <a:t>D35</a:t>
+            </a:r>
+          </a:p>
+        </p:txBody>
+      </p:sp>
+      <p:sp>
+        <p:nvSpPr>
+          <p:cNvPr id="48" name="ZoneTexte 47"/>
+          <p:cNvSpPr txBox="1"/>
+          <p:nvPr/>
+        </p:nvSpPr>
+        <p:spPr>
+          <a:xfrm>
+            <a:off x="3244971" y="4772721"/>
+            <a:ext cx="709958" cy="369332"/>
+          </a:xfrm>
+          <a:prstGeom prst="rect">
+            <a:avLst/>
+          </a:prstGeom>
+          <a:noFill/>
+        </p:spPr>
+        <p:txBody>
+          <a:bodyPr wrap="square" rtlCol="0">
+            <a:spAutoFit/>
+          </a:bodyPr>
+          <a:lstStyle/>
+          <a:p>
+            <a:r>
+              <a:rPr lang="fr-FR" dirty="0" smtClean="0">
+                <a:solidFill>
+                  <a:srgbClr val="FF0000"/>
+                </a:solidFill>
+              </a:rPr>
+              <a:t>D36</a:t>
+            </a:r>
+          </a:p>
+        </p:txBody>
+      </p:sp>
+      <p:sp>
+        <p:nvSpPr>
+          <p:cNvPr id="49" name="ZoneTexte 48"/>
+          <p:cNvSpPr txBox="1"/>
+          <p:nvPr/>
+        </p:nvSpPr>
+        <p:spPr>
+          <a:xfrm>
+            <a:off x="3244972" y="4226312"/>
+            <a:ext cx="709958" cy="369332"/>
+          </a:xfrm>
+          <a:prstGeom prst="rect">
+            <a:avLst/>
+          </a:prstGeom>
+          <a:noFill/>
+        </p:spPr>
+        <p:txBody>
+          <a:bodyPr wrap="square" rtlCol="0">
+            <a:spAutoFit/>
+          </a:bodyPr>
+          <a:lstStyle/>
+          <a:p>
+            <a:r>
+              <a:rPr lang="fr-FR" dirty="0" smtClean="0">
+                <a:solidFill>
+                  <a:srgbClr val="FF0000"/>
+                </a:solidFill>
+              </a:rPr>
+              <a:t>D37</a:t>
+            </a:r>
+          </a:p>
+        </p:txBody>
+      </p:sp>
+      <p:sp>
+        <p:nvSpPr>
+          <p:cNvPr id="50" name="ZoneTexte 49"/>
+          <p:cNvSpPr txBox="1"/>
+          <p:nvPr/>
+        </p:nvSpPr>
+        <p:spPr>
+          <a:xfrm>
+            <a:off x="7783513" y="6088565"/>
+            <a:ext cx="709958" cy="369332"/>
+          </a:xfrm>
+          <a:prstGeom prst="rect">
+            <a:avLst/>
+          </a:prstGeom>
+          <a:noFill/>
+        </p:spPr>
+        <p:txBody>
+          <a:bodyPr wrap="square" rtlCol="0">
+            <a:spAutoFit/>
+          </a:bodyPr>
+          <a:lstStyle/>
+          <a:p>
+            <a:r>
+              <a:rPr lang="fr-FR" dirty="0" smtClean="0">
+                <a:solidFill>
+                  <a:srgbClr val="FF0000"/>
+                </a:solidFill>
+              </a:rPr>
+              <a:t>VCC</a:t>
+            </a:r>
+          </a:p>
+        </p:txBody>
+      </p:sp>
+      <p:sp>
+        <p:nvSpPr>
+          <p:cNvPr id="51" name="Rectangle 50"/>
+          <p:cNvSpPr/>
+          <p:nvPr/>
+        </p:nvSpPr>
+        <p:spPr>
+          <a:xfrm rot="16200000">
+            <a:off x="1988282" y="4482119"/>
+            <a:ext cx="2120645" cy="461665"/>
+          </a:xfrm>
+          <a:prstGeom prst="rect">
+            <a:avLst/>
+          </a:prstGeom>
+        </p:spPr>
+        <p:txBody>
+          <a:bodyPr wrap="none">
+            <a:spAutoFit/>
+          </a:bodyPr>
+          <a:lstStyle/>
+          <a:p>
+            <a:r>
+              <a:rPr lang="fr-FR" sz="2400" b="1" dirty="0" smtClean="0">
+                <a:solidFill>
+                  <a:srgbClr val="FF0000"/>
+                </a:solidFill>
+              </a:rPr>
+              <a:t>Mega2560 Pins</a:t>
+            </a:r>
+            <a:endParaRPr lang="fr-FR" sz="2400" dirty="0">
+              <a:solidFill>
+                <a:srgbClr val="FF0000"/>
+              </a:solidFill>
+            </a:endParaRPr>
+          </a:p>
+        </p:txBody>
+      </p:sp>
+      <p:sp>
+        <p:nvSpPr>
+          <p:cNvPr id="52" name="Rectangle 51"/>
+          <p:cNvSpPr/>
+          <p:nvPr/>
+        </p:nvSpPr>
+        <p:spPr>
+          <a:xfrm rot="5400000">
+            <a:off x="7415209" y="1935923"/>
+            <a:ext cx="2120645" cy="461665"/>
+          </a:xfrm>
+          <a:prstGeom prst="rect">
+            <a:avLst/>
+          </a:prstGeom>
+        </p:spPr>
+        <p:txBody>
+          <a:bodyPr wrap="none">
+            <a:spAutoFit/>
+          </a:bodyPr>
+          <a:lstStyle/>
+          <a:p>
+            <a:r>
+              <a:rPr lang="fr-FR" sz="2400" b="1" dirty="0" smtClean="0">
+                <a:solidFill>
+                  <a:srgbClr val="FF0000"/>
+                </a:solidFill>
+              </a:rPr>
+              <a:t>Mega2560 Pins</a:t>
+            </a:r>
+            <a:endParaRPr lang="fr-FR" sz="2400" dirty="0">
+              <a:solidFill>
+                <a:srgbClr val="FF0000"/>
+              </a:solidFill>
+            </a:endParaRPr>
+          </a:p>
+        </p:txBody>
+      </p:sp>
+    </p:spTree>
   </p:cSld>
   <p:clrMapOvr>
     <a:masterClrMapping/>
@@ -4683,7 +6320,7 @@
     </p:spTree>
     <p:extLst>
       <p:ext uri="{BB962C8B-B14F-4D97-AF65-F5344CB8AC3E}">
-        <p14:creationId xmlns="" xmlns:p14="http://schemas.microsoft.com/office/powerpoint/2010/main" val="3760226372"/>
+        <p14:creationId xmlns:p14="http://schemas.microsoft.com/office/powerpoint/2010/main" xmlns="" val="3760226372"/>
       </p:ext>
     </p:extLst>
   </p:cSld>
@@ -4874,7 +6511,7 @@
     </p:spTree>
     <p:extLst>
       <p:ext uri="{BB962C8B-B14F-4D97-AF65-F5344CB8AC3E}">
-        <p14:creationId xmlns="" xmlns:p14="http://schemas.microsoft.com/office/powerpoint/2010/main" val="3452558061"/>
+        <p14:creationId xmlns:p14="http://schemas.microsoft.com/office/powerpoint/2010/main" xmlns="" val="3452558061"/>
       </p:ext>
     </p:extLst>
   </p:cSld>
@@ -5028,7 +6665,7 @@
     </p:spTree>
     <p:extLst>
       <p:ext uri="{BB962C8B-B14F-4D97-AF65-F5344CB8AC3E}">
-        <p14:creationId xmlns="" xmlns:p14="http://schemas.microsoft.com/office/powerpoint/2010/main" val="141957672"/>
+        <p14:creationId xmlns:p14="http://schemas.microsoft.com/office/powerpoint/2010/main" xmlns="" val="141957672"/>
       </p:ext>
     </p:extLst>
   </p:cSld>
@@ -5313,7 +6950,7 @@
     </p:spTree>
     <p:extLst>
       <p:ext uri="{BB962C8B-B14F-4D97-AF65-F5344CB8AC3E}">
-        <p14:creationId xmlns="" xmlns:p14="http://schemas.microsoft.com/office/powerpoint/2010/main" val="141957672"/>
+        <p14:creationId xmlns:p14="http://schemas.microsoft.com/office/powerpoint/2010/main" xmlns="" val="141957672"/>
       </p:ext>
     </p:extLst>
   </p:cSld>
@@ -5793,7 +7430,7 @@
   <a:extraClrSchemeLst/>
   <a:extLst>
     <a:ext uri="{05A4C25C-085E-4340-85A3-A5531E510DB2}">
-      <thm15:themeFamily xmlns="" xmlns:thm15="http://schemas.microsoft.com/office/thememl/2012/main" name="Office Theme" id="{62F939B6-93AF-4DB8-9C6B-D6C7DFDC589F}" vid="{4A3C46E8-61CC-4603-A589-7422A47A8E4A}"/>
+      <thm15:themeFamily xmlns:thm15="http://schemas.microsoft.com/office/thememl/2012/main" xmlns="" name="Office Theme" id="{62F939B6-93AF-4DB8-9C6B-D6C7DFDC589F}" vid="{4A3C46E8-61CC-4603-A589-7422A47A8E4A}"/>
     </a:ext>
   </a:extLst>
 </a:theme>

--- a/Research/Chip_comparison.pptx
+++ b/Research/Chip_comparison.pptx
@@ -115,7 +115,7 @@
   </p:defaultTextStyle>
   <p:extLst>
     <p:ext uri="{EFAFB233-063F-42B5-8137-9DF3F51BA10A}">
-      <p15:sldGuideLst xmlns:p15="http://schemas.microsoft.com/office/powerpoint/2012/main" xmlns="">
+      <p15:sldGuideLst xmlns="" xmlns:p15="http://schemas.microsoft.com/office/powerpoint/2012/main">
         <p15:guide id="1" orient="horz" pos="2160">
           <p15:clr>
             <a:srgbClr val="A4A3A4"/>
@@ -264,7 +264,7 @@
             <a:fld id="{4EA84CA3-116E-4ABF-8AA6-EBE32C84C16F}" type="datetimeFigureOut">
               <a:rPr lang="fr-FR" smtClean="0"/>
               <a:pPr/>
-              <a:t>04/09/2026</a:t>
+              <a:t>06/09/2026</a:t>
             </a:fld>
             <a:endParaRPr lang="fr-FR"/>
           </a:p>
@@ -316,7 +316,7 @@
     </p:spTree>
     <p:extLst>
       <p:ext uri="{BB962C8B-B14F-4D97-AF65-F5344CB8AC3E}">
-        <p14:creationId xmlns:p14="http://schemas.microsoft.com/office/powerpoint/2010/main" xmlns="" val="2003778223"/>
+        <p14:creationId xmlns="" xmlns:p14="http://schemas.microsoft.com/office/powerpoint/2010/main" val="2003778223"/>
       </p:ext>
     </p:extLst>
   </p:cSld>
@@ -436,7 +436,7 @@
             <a:fld id="{4EA84CA3-116E-4ABF-8AA6-EBE32C84C16F}" type="datetimeFigureOut">
               <a:rPr lang="fr-FR" smtClean="0"/>
               <a:pPr/>
-              <a:t>04/09/2026</a:t>
+              <a:t>06/09/2026</a:t>
             </a:fld>
             <a:endParaRPr lang="fr-FR"/>
           </a:p>
@@ -488,7 +488,7 @@
     </p:spTree>
     <p:extLst>
       <p:ext uri="{BB962C8B-B14F-4D97-AF65-F5344CB8AC3E}">
-        <p14:creationId xmlns:p14="http://schemas.microsoft.com/office/powerpoint/2010/main" xmlns="" val="3709322164"/>
+        <p14:creationId xmlns="" xmlns:p14="http://schemas.microsoft.com/office/powerpoint/2010/main" val="3709322164"/>
       </p:ext>
     </p:extLst>
   </p:cSld>
@@ -618,7 +618,7 @@
             <a:fld id="{4EA84CA3-116E-4ABF-8AA6-EBE32C84C16F}" type="datetimeFigureOut">
               <a:rPr lang="fr-FR" smtClean="0"/>
               <a:pPr/>
-              <a:t>04/09/2026</a:t>
+              <a:t>06/09/2026</a:t>
             </a:fld>
             <a:endParaRPr lang="fr-FR"/>
           </a:p>
@@ -670,7 +670,7 @@
     </p:spTree>
     <p:extLst>
       <p:ext uri="{BB962C8B-B14F-4D97-AF65-F5344CB8AC3E}">
-        <p14:creationId xmlns:p14="http://schemas.microsoft.com/office/powerpoint/2010/main" xmlns="" val="1419434073"/>
+        <p14:creationId xmlns="" xmlns:p14="http://schemas.microsoft.com/office/powerpoint/2010/main" val="1419434073"/>
       </p:ext>
     </p:extLst>
   </p:cSld>
@@ -790,7 +790,7 @@
             <a:fld id="{4EA84CA3-116E-4ABF-8AA6-EBE32C84C16F}" type="datetimeFigureOut">
               <a:rPr lang="fr-FR" smtClean="0"/>
               <a:pPr/>
-              <a:t>04/09/2026</a:t>
+              <a:t>06/09/2026</a:t>
             </a:fld>
             <a:endParaRPr lang="fr-FR"/>
           </a:p>
@@ -842,7 +842,7 @@
     </p:spTree>
     <p:extLst>
       <p:ext uri="{BB962C8B-B14F-4D97-AF65-F5344CB8AC3E}">
-        <p14:creationId xmlns:p14="http://schemas.microsoft.com/office/powerpoint/2010/main" xmlns="" val="1102157496"/>
+        <p14:creationId xmlns="" xmlns:p14="http://schemas.microsoft.com/office/powerpoint/2010/main" val="1102157496"/>
       </p:ext>
     </p:extLst>
   </p:cSld>
@@ -1038,7 +1038,7 @@
             <a:fld id="{4EA84CA3-116E-4ABF-8AA6-EBE32C84C16F}" type="datetimeFigureOut">
               <a:rPr lang="fr-FR" smtClean="0"/>
               <a:pPr/>
-              <a:t>04/09/2026</a:t>
+              <a:t>06/09/2026</a:t>
             </a:fld>
             <a:endParaRPr lang="fr-FR"/>
           </a:p>
@@ -1090,7 +1090,7 @@
     </p:spTree>
     <p:extLst>
       <p:ext uri="{BB962C8B-B14F-4D97-AF65-F5344CB8AC3E}">
-        <p14:creationId xmlns:p14="http://schemas.microsoft.com/office/powerpoint/2010/main" xmlns="" val="660080195"/>
+        <p14:creationId xmlns="" xmlns:p14="http://schemas.microsoft.com/office/powerpoint/2010/main" val="660080195"/>
       </p:ext>
     </p:extLst>
   </p:cSld>
@@ -1272,7 +1272,7 @@
             <a:fld id="{4EA84CA3-116E-4ABF-8AA6-EBE32C84C16F}" type="datetimeFigureOut">
               <a:rPr lang="fr-FR" smtClean="0"/>
               <a:pPr/>
-              <a:t>04/09/2026</a:t>
+              <a:t>06/09/2026</a:t>
             </a:fld>
             <a:endParaRPr lang="fr-FR"/>
           </a:p>
@@ -1324,7 +1324,7 @@
     </p:spTree>
     <p:extLst>
       <p:ext uri="{BB962C8B-B14F-4D97-AF65-F5344CB8AC3E}">
-        <p14:creationId xmlns:p14="http://schemas.microsoft.com/office/powerpoint/2010/main" xmlns="" val="2283449542"/>
+        <p14:creationId xmlns="" xmlns:p14="http://schemas.microsoft.com/office/powerpoint/2010/main" val="2283449542"/>
       </p:ext>
     </p:extLst>
   </p:cSld>
@@ -1641,7 +1641,7 @@
             <a:fld id="{4EA84CA3-116E-4ABF-8AA6-EBE32C84C16F}" type="datetimeFigureOut">
               <a:rPr lang="fr-FR" smtClean="0"/>
               <a:pPr/>
-              <a:t>04/09/2026</a:t>
+              <a:t>06/09/2026</a:t>
             </a:fld>
             <a:endParaRPr lang="fr-FR"/>
           </a:p>
@@ -1693,7 +1693,7 @@
     </p:spTree>
     <p:extLst>
       <p:ext uri="{BB962C8B-B14F-4D97-AF65-F5344CB8AC3E}">
-        <p14:creationId xmlns:p14="http://schemas.microsoft.com/office/powerpoint/2010/main" xmlns="" val="2663865323"/>
+        <p14:creationId xmlns="" xmlns:p14="http://schemas.microsoft.com/office/powerpoint/2010/main" val="2663865323"/>
       </p:ext>
     </p:extLst>
   </p:cSld>
@@ -1761,7 +1761,7 @@
             <a:fld id="{4EA84CA3-116E-4ABF-8AA6-EBE32C84C16F}" type="datetimeFigureOut">
               <a:rPr lang="fr-FR" smtClean="0"/>
               <a:pPr/>
-              <a:t>04/09/2026</a:t>
+              <a:t>06/09/2026</a:t>
             </a:fld>
             <a:endParaRPr lang="fr-FR"/>
           </a:p>
@@ -1813,7 +1813,7 @@
     </p:spTree>
     <p:extLst>
       <p:ext uri="{BB962C8B-B14F-4D97-AF65-F5344CB8AC3E}">
-        <p14:creationId xmlns:p14="http://schemas.microsoft.com/office/powerpoint/2010/main" xmlns="" val="376323583"/>
+        <p14:creationId xmlns="" xmlns:p14="http://schemas.microsoft.com/office/powerpoint/2010/main" val="376323583"/>
       </p:ext>
     </p:extLst>
   </p:cSld>
@@ -1858,7 +1858,7 @@
             <a:fld id="{4EA84CA3-116E-4ABF-8AA6-EBE32C84C16F}" type="datetimeFigureOut">
               <a:rPr lang="fr-FR" smtClean="0"/>
               <a:pPr/>
-              <a:t>04/09/2026</a:t>
+              <a:t>06/09/2026</a:t>
             </a:fld>
             <a:endParaRPr lang="fr-FR"/>
           </a:p>
@@ -1910,7 +1910,7 @@
     </p:spTree>
     <p:extLst>
       <p:ext uri="{BB962C8B-B14F-4D97-AF65-F5344CB8AC3E}">
-        <p14:creationId xmlns:p14="http://schemas.microsoft.com/office/powerpoint/2010/main" xmlns="" val="3989902220"/>
+        <p14:creationId xmlns="" xmlns:p14="http://schemas.microsoft.com/office/powerpoint/2010/main" val="3989902220"/>
       </p:ext>
     </p:extLst>
   </p:cSld>
@@ -2137,7 +2137,7 @@
             <a:fld id="{4EA84CA3-116E-4ABF-8AA6-EBE32C84C16F}" type="datetimeFigureOut">
               <a:rPr lang="fr-FR" smtClean="0"/>
               <a:pPr/>
-              <a:t>04/09/2026</a:t>
+              <a:t>06/09/2026</a:t>
             </a:fld>
             <a:endParaRPr lang="fr-FR"/>
           </a:p>
@@ -2189,7 +2189,7 @@
     </p:spTree>
     <p:extLst>
       <p:ext uri="{BB962C8B-B14F-4D97-AF65-F5344CB8AC3E}">
-        <p14:creationId xmlns:p14="http://schemas.microsoft.com/office/powerpoint/2010/main" xmlns="" val="1997102884"/>
+        <p14:creationId xmlns="" xmlns:p14="http://schemas.microsoft.com/office/powerpoint/2010/main" val="1997102884"/>
       </p:ext>
     </p:extLst>
   </p:cSld>
@@ -2392,7 +2392,7 @@
             <a:fld id="{4EA84CA3-116E-4ABF-8AA6-EBE32C84C16F}" type="datetimeFigureOut">
               <a:rPr lang="fr-FR" smtClean="0"/>
               <a:pPr/>
-              <a:t>04/09/2026</a:t>
+              <a:t>06/09/2026</a:t>
             </a:fld>
             <a:endParaRPr lang="fr-FR"/>
           </a:p>
@@ -2444,7 +2444,7 @@
     </p:spTree>
     <p:extLst>
       <p:ext uri="{BB962C8B-B14F-4D97-AF65-F5344CB8AC3E}">
-        <p14:creationId xmlns:p14="http://schemas.microsoft.com/office/powerpoint/2010/main" xmlns="" val="3738991770"/>
+        <p14:creationId xmlns="" xmlns:p14="http://schemas.microsoft.com/office/powerpoint/2010/main" val="3738991770"/>
       </p:ext>
     </p:extLst>
   </p:cSld>
@@ -2607,7 +2607,7 @@
             <a:fld id="{4EA84CA3-116E-4ABF-8AA6-EBE32C84C16F}" type="datetimeFigureOut">
               <a:rPr lang="fr-FR" smtClean="0"/>
               <a:pPr/>
-              <a:t>04/09/2026</a:t>
+              <a:t>06/09/2026</a:t>
             </a:fld>
             <a:endParaRPr lang="fr-FR"/>
           </a:p>
@@ -2695,7 +2695,7 @@
     </p:spTree>
     <p:extLst>
       <p:ext uri="{BB962C8B-B14F-4D97-AF65-F5344CB8AC3E}">
-        <p14:creationId xmlns:p14="http://schemas.microsoft.com/office/powerpoint/2010/main" xmlns="" val="4265157320"/>
+        <p14:creationId xmlns="" xmlns:p14="http://schemas.microsoft.com/office/powerpoint/2010/main" val="4265157320"/>
       </p:ext>
     </p:extLst>
   </p:cSld>
@@ -3798,7 +3798,7 @@
     </p:spTree>
     <p:extLst>
       <p:ext uri="{BB962C8B-B14F-4D97-AF65-F5344CB8AC3E}">
-        <p14:creationId xmlns:p14="http://schemas.microsoft.com/office/powerpoint/2010/main" xmlns="" val="3760226372"/>
+        <p14:creationId xmlns="" xmlns:p14="http://schemas.microsoft.com/office/powerpoint/2010/main" val="3760226372"/>
       </p:ext>
     </p:extLst>
   </p:cSld>
@@ -4730,8 +4730,13 @@
                   <a:srgbClr val="FF0000"/>
                 </a:solidFill>
               </a:rPr>
-              <a:t>D6</a:t>
-            </a:r>
+              <a:t>D16</a:t>
+            </a:r>
+            <a:endParaRPr lang="fr-FR" dirty="0" smtClean="0">
+              <a:solidFill>
+                <a:srgbClr val="FF0000"/>
+              </a:solidFill>
+            </a:endParaRPr>
           </a:p>
         </p:txBody>
       </p:sp>
@@ -6320,7 +6325,7 @@
     </p:spTree>
     <p:extLst>
       <p:ext uri="{BB962C8B-B14F-4D97-AF65-F5344CB8AC3E}">
-        <p14:creationId xmlns:p14="http://schemas.microsoft.com/office/powerpoint/2010/main" xmlns="" val="3760226372"/>
+        <p14:creationId xmlns="" xmlns:p14="http://schemas.microsoft.com/office/powerpoint/2010/main" val="3760226372"/>
       </p:ext>
     </p:extLst>
   </p:cSld>
@@ -6511,7 +6516,7 @@
     </p:spTree>
     <p:extLst>
       <p:ext uri="{BB962C8B-B14F-4D97-AF65-F5344CB8AC3E}">
-        <p14:creationId xmlns:p14="http://schemas.microsoft.com/office/powerpoint/2010/main" xmlns="" val="3452558061"/>
+        <p14:creationId xmlns="" xmlns:p14="http://schemas.microsoft.com/office/powerpoint/2010/main" val="3452558061"/>
       </p:ext>
     </p:extLst>
   </p:cSld>
@@ -6665,7 +6670,7 @@
     </p:spTree>
     <p:extLst>
       <p:ext uri="{BB962C8B-B14F-4D97-AF65-F5344CB8AC3E}">
-        <p14:creationId xmlns:p14="http://schemas.microsoft.com/office/powerpoint/2010/main" xmlns="" val="141957672"/>
+        <p14:creationId xmlns="" xmlns:p14="http://schemas.microsoft.com/office/powerpoint/2010/main" val="141957672"/>
       </p:ext>
     </p:extLst>
   </p:cSld>
@@ -6950,7 +6955,7 @@
     </p:spTree>
     <p:extLst>
       <p:ext uri="{BB962C8B-B14F-4D97-AF65-F5344CB8AC3E}">
-        <p14:creationId xmlns:p14="http://schemas.microsoft.com/office/powerpoint/2010/main" xmlns="" val="141957672"/>
+        <p14:creationId xmlns="" xmlns:p14="http://schemas.microsoft.com/office/powerpoint/2010/main" val="141957672"/>
       </p:ext>
     </p:extLst>
   </p:cSld>
@@ -7430,7 +7435,7 @@
   <a:extraClrSchemeLst/>
   <a:extLst>
     <a:ext uri="{05A4C25C-085E-4340-85A3-A5531E510DB2}">
-      <thm15:themeFamily xmlns:thm15="http://schemas.microsoft.com/office/thememl/2012/main" xmlns="" name="Office Theme" id="{62F939B6-93AF-4DB8-9C6B-D6C7DFDC589F}" vid="{4A3C46E8-61CC-4603-A589-7422A47A8E4A}"/>
+      <thm15:themeFamily xmlns="" xmlns:thm15="http://schemas.microsoft.com/office/thememl/2012/main" name="Office Theme" id="{62F939B6-93AF-4DB8-9C6B-D6C7DFDC589F}" vid="{4A3C46E8-61CC-4603-A589-7422A47A8E4A}"/>
     </a:ext>
   </a:extLst>
 </a:theme>

--- a/Research/Chip_comparison.pptx
+++ b/Research/Chip_comparison.pptx
@@ -15,6 +15,7 @@
     <p:sldId id="263" r:id="rId9"/>
     <p:sldId id="264" r:id="rId10"/>
     <p:sldId id="265" r:id="rId11"/>
+    <p:sldId id="266" r:id="rId12"/>
   </p:sldIdLst>
   <p:sldSz cx="12192000" cy="6858000"/>
   <p:notesSz cx="6858000" cy="9144000"/>
@@ -115,7 +116,7 @@
   </p:defaultTextStyle>
   <p:extLst>
     <p:ext uri="{EFAFB233-063F-42B5-8137-9DF3F51BA10A}">
-      <p15:sldGuideLst xmlns="" xmlns:p15="http://schemas.microsoft.com/office/powerpoint/2012/main">
+      <p15:sldGuideLst xmlns:p15="http://schemas.microsoft.com/office/powerpoint/2012/main">
         <p15:guide id="1" orient="horz" pos="2160">
           <p15:clr>
             <a:srgbClr val="A4A3A4"/>
@@ -130,6 +131,18 @@
     </p:ext>
   </p:extLst>
 </p:presentation>
+</file>
+
+<file path=ppt/commentAuthors.xml><?xml version="1.0" encoding="utf-8"?>
+<p:cmAuthorLst xmlns:a="http://schemas.openxmlformats.org/drawingml/2006/main" xmlns:r="http://schemas.openxmlformats.org/officeDocument/2006/relationships" xmlns:p="http://schemas.openxmlformats.org/presentationml/2006/main">
+  <p:cmAuthor id="1" name="boichot" initials="b" lastIdx="1" clrIdx="0">
+    <p:extLst>
+      <p:ext uri="{19B8F6BF-5375-455C-9EA6-DF929625EA0E}">
+        <p15:presenceInfo xmlns:p15="http://schemas.microsoft.com/office/powerpoint/2012/main" userId="boichot" providerId="None"/>
+      </p:ext>
+    </p:extLst>
+  </p:cmAuthor>
+</p:cmAuthorLst>
 </file>
 
 <file path=ppt/slideLayouts/slideLayout1.xml><?xml version="1.0" encoding="utf-8"?>
@@ -264,7 +277,7 @@
             <a:fld id="{4EA84CA3-116E-4ABF-8AA6-EBE32C84C16F}" type="datetimeFigureOut">
               <a:rPr lang="fr-FR" smtClean="0"/>
               <a:pPr/>
-              <a:t>06/09/2026</a:t>
+              <a:t>10/09/2026</a:t>
             </a:fld>
             <a:endParaRPr lang="fr-FR"/>
           </a:p>
@@ -316,7 +329,7 @@
     </p:spTree>
     <p:extLst>
       <p:ext uri="{BB962C8B-B14F-4D97-AF65-F5344CB8AC3E}">
-        <p14:creationId xmlns="" xmlns:p14="http://schemas.microsoft.com/office/powerpoint/2010/main" val="2003778223"/>
+        <p14:creationId xmlns:p14="http://schemas.microsoft.com/office/powerpoint/2010/main" val="2003778223"/>
       </p:ext>
     </p:extLst>
   </p:cSld>
@@ -436,7 +449,7 @@
             <a:fld id="{4EA84CA3-116E-4ABF-8AA6-EBE32C84C16F}" type="datetimeFigureOut">
               <a:rPr lang="fr-FR" smtClean="0"/>
               <a:pPr/>
-              <a:t>06/09/2026</a:t>
+              <a:t>10/09/2026</a:t>
             </a:fld>
             <a:endParaRPr lang="fr-FR"/>
           </a:p>
@@ -488,7 +501,7 @@
     </p:spTree>
     <p:extLst>
       <p:ext uri="{BB962C8B-B14F-4D97-AF65-F5344CB8AC3E}">
-        <p14:creationId xmlns="" xmlns:p14="http://schemas.microsoft.com/office/powerpoint/2010/main" val="3709322164"/>
+        <p14:creationId xmlns:p14="http://schemas.microsoft.com/office/powerpoint/2010/main" val="3709322164"/>
       </p:ext>
     </p:extLst>
   </p:cSld>
@@ -618,7 +631,7 @@
             <a:fld id="{4EA84CA3-116E-4ABF-8AA6-EBE32C84C16F}" type="datetimeFigureOut">
               <a:rPr lang="fr-FR" smtClean="0"/>
               <a:pPr/>
-              <a:t>06/09/2026</a:t>
+              <a:t>10/09/2026</a:t>
             </a:fld>
             <a:endParaRPr lang="fr-FR"/>
           </a:p>
@@ -670,7 +683,7 @@
     </p:spTree>
     <p:extLst>
       <p:ext uri="{BB962C8B-B14F-4D97-AF65-F5344CB8AC3E}">
-        <p14:creationId xmlns="" xmlns:p14="http://schemas.microsoft.com/office/powerpoint/2010/main" val="1419434073"/>
+        <p14:creationId xmlns:p14="http://schemas.microsoft.com/office/powerpoint/2010/main" val="1419434073"/>
       </p:ext>
     </p:extLst>
   </p:cSld>
@@ -790,7 +803,7 @@
             <a:fld id="{4EA84CA3-116E-4ABF-8AA6-EBE32C84C16F}" type="datetimeFigureOut">
               <a:rPr lang="fr-FR" smtClean="0"/>
               <a:pPr/>
-              <a:t>06/09/2026</a:t>
+              <a:t>10/09/2026</a:t>
             </a:fld>
             <a:endParaRPr lang="fr-FR"/>
           </a:p>
@@ -842,7 +855,7 @@
     </p:spTree>
     <p:extLst>
       <p:ext uri="{BB962C8B-B14F-4D97-AF65-F5344CB8AC3E}">
-        <p14:creationId xmlns="" xmlns:p14="http://schemas.microsoft.com/office/powerpoint/2010/main" val="1102157496"/>
+        <p14:creationId xmlns:p14="http://schemas.microsoft.com/office/powerpoint/2010/main" val="1102157496"/>
       </p:ext>
     </p:extLst>
   </p:cSld>
@@ -1038,7 +1051,7 @@
             <a:fld id="{4EA84CA3-116E-4ABF-8AA6-EBE32C84C16F}" type="datetimeFigureOut">
               <a:rPr lang="fr-FR" smtClean="0"/>
               <a:pPr/>
-              <a:t>06/09/2026</a:t>
+              <a:t>10/09/2026</a:t>
             </a:fld>
             <a:endParaRPr lang="fr-FR"/>
           </a:p>
@@ -1090,7 +1103,7 @@
     </p:spTree>
     <p:extLst>
       <p:ext uri="{BB962C8B-B14F-4D97-AF65-F5344CB8AC3E}">
-        <p14:creationId xmlns="" xmlns:p14="http://schemas.microsoft.com/office/powerpoint/2010/main" val="660080195"/>
+        <p14:creationId xmlns:p14="http://schemas.microsoft.com/office/powerpoint/2010/main" val="660080195"/>
       </p:ext>
     </p:extLst>
   </p:cSld>
@@ -1272,7 +1285,7 @@
             <a:fld id="{4EA84CA3-116E-4ABF-8AA6-EBE32C84C16F}" type="datetimeFigureOut">
               <a:rPr lang="fr-FR" smtClean="0"/>
               <a:pPr/>
-              <a:t>06/09/2026</a:t>
+              <a:t>10/09/2026</a:t>
             </a:fld>
             <a:endParaRPr lang="fr-FR"/>
           </a:p>
@@ -1324,7 +1337,7 @@
     </p:spTree>
     <p:extLst>
       <p:ext uri="{BB962C8B-B14F-4D97-AF65-F5344CB8AC3E}">
-        <p14:creationId xmlns="" xmlns:p14="http://schemas.microsoft.com/office/powerpoint/2010/main" val="2283449542"/>
+        <p14:creationId xmlns:p14="http://schemas.microsoft.com/office/powerpoint/2010/main" val="2283449542"/>
       </p:ext>
     </p:extLst>
   </p:cSld>
@@ -1641,7 +1654,7 @@
             <a:fld id="{4EA84CA3-116E-4ABF-8AA6-EBE32C84C16F}" type="datetimeFigureOut">
               <a:rPr lang="fr-FR" smtClean="0"/>
               <a:pPr/>
-              <a:t>06/09/2026</a:t>
+              <a:t>10/09/2026</a:t>
             </a:fld>
             <a:endParaRPr lang="fr-FR"/>
           </a:p>
@@ -1693,7 +1706,7 @@
     </p:spTree>
     <p:extLst>
       <p:ext uri="{BB962C8B-B14F-4D97-AF65-F5344CB8AC3E}">
-        <p14:creationId xmlns="" xmlns:p14="http://schemas.microsoft.com/office/powerpoint/2010/main" val="2663865323"/>
+        <p14:creationId xmlns:p14="http://schemas.microsoft.com/office/powerpoint/2010/main" val="2663865323"/>
       </p:ext>
     </p:extLst>
   </p:cSld>
@@ -1761,7 +1774,7 @@
             <a:fld id="{4EA84CA3-116E-4ABF-8AA6-EBE32C84C16F}" type="datetimeFigureOut">
               <a:rPr lang="fr-FR" smtClean="0"/>
               <a:pPr/>
-              <a:t>06/09/2026</a:t>
+              <a:t>10/09/2026</a:t>
             </a:fld>
             <a:endParaRPr lang="fr-FR"/>
           </a:p>
@@ -1813,7 +1826,7 @@
     </p:spTree>
     <p:extLst>
       <p:ext uri="{BB962C8B-B14F-4D97-AF65-F5344CB8AC3E}">
-        <p14:creationId xmlns="" xmlns:p14="http://schemas.microsoft.com/office/powerpoint/2010/main" val="376323583"/>
+        <p14:creationId xmlns:p14="http://schemas.microsoft.com/office/powerpoint/2010/main" val="376323583"/>
       </p:ext>
     </p:extLst>
   </p:cSld>
@@ -1858,7 +1871,7 @@
             <a:fld id="{4EA84CA3-116E-4ABF-8AA6-EBE32C84C16F}" type="datetimeFigureOut">
               <a:rPr lang="fr-FR" smtClean="0"/>
               <a:pPr/>
-              <a:t>06/09/2026</a:t>
+              <a:t>10/09/2026</a:t>
             </a:fld>
             <a:endParaRPr lang="fr-FR"/>
           </a:p>
@@ -1910,7 +1923,7 @@
     </p:spTree>
     <p:extLst>
       <p:ext uri="{BB962C8B-B14F-4D97-AF65-F5344CB8AC3E}">
-        <p14:creationId xmlns="" xmlns:p14="http://schemas.microsoft.com/office/powerpoint/2010/main" val="3989902220"/>
+        <p14:creationId xmlns:p14="http://schemas.microsoft.com/office/powerpoint/2010/main" val="3989902220"/>
       </p:ext>
     </p:extLst>
   </p:cSld>
@@ -2137,7 +2150,7 @@
             <a:fld id="{4EA84CA3-116E-4ABF-8AA6-EBE32C84C16F}" type="datetimeFigureOut">
               <a:rPr lang="fr-FR" smtClean="0"/>
               <a:pPr/>
-              <a:t>06/09/2026</a:t>
+              <a:t>10/09/2026</a:t>
             </a:fld>
             <a:endParaRPr lang="fr-FR"/>
           </a:p>
@@ -2189,7 +2202,7 @@
     </p:spTree>
     <p:extLst>
       <p:ext uri="{BB962C8B-B14F-4D97-AF65-F5344CB8AC3E}">
-        <p14:creationId xmlns="" xmlns:p14="http://schemas.microsoft.com/office/powerpoint/2010/main" val="1997102884"/>
+        <p14:creationId xmlns:p14="http://schemas.microsoft.com/office/powerpoint/2010/main" val="1997102884"/>
       </p:ext>
     </p:extLst>
   </p:cSld>
@@ -2392,7 +2405,7 @@
             <a:fld id="{4EA84CA3-116E-4ABF-8AA6-EBE32C84C16F}" type="datetimeFigureOut">
               <a:rPr lang="fr-FR" smtClean="0"/>
               <a:pPr/>
-              <a:t>06/09/2026</a:t>
+              <a:t>10/09/2026</a:t>
             </a:fld>
             <a:endParaRPr lang="fr-FR"/>
           </a:p>
@@ -2444,7 +2457,7 @@
     </p:spTree>
     <p:extLst>
       <p:ext uri="{BB962C8B-B14F-4D97-AF65-F5344CB8AC3E}">
-        <p14:creationId xmlns="" xmlns:p14="http://schemas.microsoft.com/office/powerpoint/2010/main" val="3738991770"/>
+        <p14:creationId xmlns:p14="http://schemas.microsoft.com/office/powerpoint/2010/main" val="3738991770"/>
       </p:ext>
     </p:extLst>
   </p:cSld>
@@ -2607,7 +2620,7 @@
             <a:fld id="{4EA84CA3-116E-4ABF-8AA6-EBE32C84C16F}" type="datetimeFigureOut">
               <a:rPr lang="fr-FR" smtClean="0"/>
               <a:pPr/>
-              <a:t>06/09/2026</a:t>
+              <a:t>10/09/2026</a:t>
             </a:fld>
             <a:endParaRPr lang="fr-FR"/>
           </a:p>
@@ -2695,7 +2708,7 @@
     </p:spTree>
     <p:extLst>
       <p:ext uri="{BB962C8B-B14F-4D97-AF65-F5344CB8AC3E}">
-        <p14:creationId xmlns="" xmlns:p14="http://schemas.microsoft.com/office/powerpoint/2010/main" val="4265157320"/>
+        <p14:creationId xmlns:p14="http://schemas.microsoft.com/office/powerpoint/2010/main" val="4265157320"/>
       </p:ext>
     </p:extLst>
   </p:cSld>
@@ -3798,7 +3811,7 @@
     </p:spTree>
     <p:extLst>
       <p:ext uri="{BB962C8B-B14F-4D97-AF65-F5344CB8AC3E}">
-        <p14:creationId xmlns="" xmlns:p14="http://schemas.microsoft.com/office/powerpoint/2010/main" val="3760226372"/>
+        <p14:creationId xmlns:p14="http://schemas.microsoft.com/office/powerpoint/2010/main" val="3760226372"/>
       </p:ext>
     </p:extLst>
   </p:cSld>
@@ -4631,106 +4644,7 @@
                   <a:srgbClr val="FF0000"/>
                 </a:solidFill>
               </a:rPr>
-              <a:t>D6 (VCC)</a:t>
-            </a:r>
-          </a:p>
-        </p:txBody>
-      </p:sp>
-      <p:sp>
-        <p:nvSpPr>
-          <p:cNvPr id="29" name="ZoneTexte 28"/>
-          <p:cNvSpPr txBox="1"/>
-          <p:nvPr/>
-        </p:nvSpPr>
-        <p:spPr>
-          <a:xfrm>
-            <a:off x="3256117" y="323382"/>
-            <a:ext cx="557560" cy="369332"/>
-          </a:xfrm>
-          <a:prstGeom prst="rect">
-            <a:avLst/>
-          </a:prstGeom>
-          <a:noFill/>
-        </p:spPr>
-        <p:txBody>
-          <a:bodyPr wrap="square" rtlCol="0">
-            <a:spAutoFit/>
-          </a:bodyPr>
-          <a:lstStyle/>
-          <a:p>
-            <a:r>
-              <a:rPr lang="fr-FR" dirty="0" smtClean="0">
-                <a:solidFill>
-                  <a:srgbClr val="FF0000"/>
-                </a:solidFill>
-              </a:rPr>
-              <a:t>D7</a:t>
-            </a:r>
-          </a:p>
-        </p:txBody>
-      </p:sp>
-      <p:sp>
-        <p:nvSpPr>
-          <p:cNvPr id="30" name="ZoneTexte 29"/>
-          <p:cNvSpPr txBox="1"/>
-          <p:nvPr/>
-        </p:nvSpPr>
-        <p:spPr>
-          <a:xfrm>
-            <a:off x="3207796" y="3375100"/>
-            <a:ext cx="557560" cy="369332"/>
-          </a:xfrm>
-          <a:prstGeom prst="rect">
-            <a:avLst/>
-          </a:prstGeom>
-          <a:noFill/>
-        </p:spPr>
-        <p:txBody>
-          <a:bodyPr wrap="square" rtlCol="0">
-            <a:spAutoFit/>
-          </a:bodyPr>
-          <a:lstStyle/>
-          <a:p>
-            <a:r>
-              <a:rPr lang="fr-FR" dirty="0" smtClean="0">
-                <a:solidFill>
-                  <a:srgbClr val="FF0000"/>
-                </a:solidFill>
-              </a:rPr>
-              <a:t>D9</a:t>
-            </a:r>
-          </a:p>
-        </p:txBody>
-      </p:sp>
-      <p:sp>
-        <p:nvSpPr>
-          <p:cNvPr id="31" name="ZoneTexte 30"/>
-          <p:cNvSpPr txBox="1"/>
-          <p:nvPr/>
-        </p:nvSpPr>
-        <p:spPr>
-          <a:xfrm>
-            <a:off x="3215231" y="3917793"/>
-            <a:ext cx="557560" cy="369332"/>
-          </a:xfrm>
-          <a:prstGeom prst="rect">
-            <a:avLst/>
-          </a:prstGeom>
-          <a:noFill/>
-        </p:spPr>
-        <p:txBody>
-          <a:bodyPr wrap="square" rtlCol="0">
-            <a:spAutoFit/>
-          </a:bodyPr>
-          <a:lstStyle/>
-          <a:p>
-            <a:r>
-              <a:rPr lang="fr-FR" dirty="0" smtClean="0">
-                <a:solidFill>
-                  <a:srgbClr val="FF0000"/>
-                </a:solidFill>
-              </a:rPr>
-              <a:t>D16</a:t>
+              <a:t>D6</a:t>
             </a:r>
             <a:endParaRPr lang="fr-FR" dirty="0" smtClean="0">
               <a:solidFill>
@@ -4742,6 +4656,105 @@
       </p:sp>
       <p:sp>
         <p:nvSpPr>
+          <p:cNvPr id="29" name="ZoneTexte 28"/>
+          <p:cNvSpPr txBox="1"/>
+          <p:nvPr/>
+        </p:nvSpPr>
+        <p:spPr>
+          <a:xfrm>
+            <a:off x="3256117" y="323382"/>
+            <a:ext cx="557560" cy="369332"/>
+          </a:xfrm>
+          <a:prstGeom prst="rect">
+            <a:avLst/>
+          </a:prstGeom>
+          <a:noFill/>
+        </p:spPr>
+        <p:txBody>
+          <a:bodyPr wrap="square" rtlCol="0">
+            <a:spAutoFit/>
+          </a:bodyPr>
+          <a:lstStyle/>
+          <a:p>
+            <a:r>
+              <a:rPr lang="fr-FR" dirty="0" smtClean="0">
+                <a:solidFill>
+                  <a:srgbClr val="FF0000"/>
+                </a:solidFill>
+              </a:rPr>
+              <a:t>D7</a:t>
+            </a:r>
+          </a:p>
+        </p:txBody>
+      </p:sp>
+      <p:sp>
+        <p:nvSpPr>
+          <p:cNvPr id="30" name="ZoneTexte 29"/>
+          <p:cNvSpPr txBox="1"/>
+          <p:nvPr/>
+        </p:nvSpPr>
+        <p:spPr>
+          <a:xfrm>
+            <a:off x="3207796" y="3375100"/>
+            <a:ext cx="557560" cy="369332"/>
+          </a:xfrm>
+          <a:prstGeom prst="rect">
+            <a:avLst/>
+          </a:prstGeom>
+          <a:noFill/>
+        </p:spPr>
+        <p:txBody>
+          <a:bodyPr wrap="square" rtlCol="0">
+            <a:spAutoFit/>
+          </a:bodyPr>
+          <a:lstStyle/>
+          <a:p>
+            <a:r>
+              <a:rPr lang="fr-FR" dirty="0" smtClean="0">
+                <a:solidFill>
+                  <a:srgbClr val="FF0000"/>
+                </a:solidFill>
+              </a:rPr>
+              <a:t>D9</a:t>
+            </a:r>
+          </a:p>
+        </p:txBody>
+      </p:sp>
+      <p:sp>
+        <p:nvSpPr>
+          <p:cNvPr id="31" name="ZoneTexte 30"/>
+          <p:cNvSpPr txBox="1"/>
+          <p:nvPr/>
+        </p:nvSpPr>
+        <p:spPr>
+          <a:xfrm>
+            <a:off x="3215231" y="3917793"/>
+            <a:ext cx="557560" cy="369332"/>
+          </a:xfrm>
+          <a:prstGeom prst="rect">
+            <a:avLst/>
+          </a:prstGeom>
+          <a:noFill/>
+        </p:spPr>
+        <p:txBody>
+          <a:bodyPr wrap="square" rtlCol="0">
+            <a:spAutoFit/>
+          </a:bodyPr>
+          <a:lstStyle/>
+          <a:p>
+            <a:r>
+              <a:rPr lang="fr-FR" dirty="0" smtClean="0">
+                <a:solidFill>
+                  <a:srgbClr val="FF0000"/>
+                </a:solidFill>
+              </a:rPr>
+              <a:t>D16</a:t>
+            </a:r>
+          </a:p>
+        </p:txBody>
+      </p:sp>
+      <p:sp>
+        <p:nvSpPr>
           <p:cNvPr id="32" name="ZoneTexte 31"/>
           <p:cNvSpPr txBox="1"/>
           <p:nvPr/>
@@ -5442,6 +5455,1811 @@
         </p:txBody>
       </p:sp>
     </p:spTree>
+  </p:cSld>
+  <p:clrMapOvr>
+    <a:masterClrMapping/>
+  </p:clrMapOvr>
+  <p:timing>
+    <p:tnLst>
+      <p:par>
+        <p:cTn id="1" dur="indefinite" restart="never" nodeType="tmRoot"/>
+      </p:par>
+    </p:tnLst>
+  </p:timing>
+</p:sld>
+</file>
+
+<file path=ppt/slides/slide11.xml><?xml version="1.0" encoding="utf-8"?>
+<p:sld xmlns:a="http://schemas.openxmlformats.org/drawingml/2006/main" xmlns:r="http://schemas.openxmlformats.org/officeDocument/2006/relationships" xmlns:p="http://schemas.openxmlformats.org/presentationml/2006/main">
+  <p:cSld>
+    <p:spTree>
+      <p:nvGrpSpPr>
+        <p:cNvPr id="1" name=""/>
+        <p:cNvGrpSpPr/>
+        <p:nvPr/>
+      </p:nvGrpSpPr>
+      <p:grpSpPr>
+        <a:xfrm>
+          <a:off x="0" y="0"/>
+          <a:ext cx="0" cy="0"/>
+          <a:chOff x="0" y="0"/>
+          <a:chExt cx="0" cy="0"/>
+        </a:xfrm>
+      </p:grpSpPr>
+      <p:pic>
+        <p:nvPicPr>
+          <p:cNvPr id="1026" name="Picture 2"/>
+          <p:cNvPicPr>
+            <a:picLocks noChangeAspect="1" noChangeArrowheads="1"/>
+          </p:cNvPicPr>
+          <p:nvPr/>
+        </p:nvPicPr>
+        <p:blipFill>
+          <a:blip r:embed="rId2" cstate="print"/>
+          <a:srcRect/>
+          <a:stretch>
+            <a:fillRect/>
+          </a:stretch>
+        </p:blipFill>
+        <p:spPr bwMode="auto">
+          <a:xfrm>
+            <a:off x="3930687" y="227207"/>
+            <a:ext cx="3812704" cy="6452374"/>
+          </a:xfrm>
+          <a:prstGeom prst="rect">
+            <a:avLst/>
+          </a:prstGeom>
+          <a:noFill/>
+          <a:ln w="9525">
+            <a:noFill/>
+            <a:miter lim="800000"/>
+            <a:headEnd/>
+            <a:tailEnd/>
+          </a:ln>
+          <a:effectLst/>
+        </p:spPr>
+      </p:pic>
+      <p:sp>
+        <p:nvSpPr>
+          <p:cNvPr id="2" name="Rectangle 1"/>
+          <p:cNvSpPr/>
+          <p:nvPr/>
+        </p:nvSpPr>
+        <p:spPr>
+          <a:xfrm rot="16200000">
+            <a:off x="3795715" y="3100388"/>
+            <a:ext cx="3705225" cy="628650"/>
+          </a:xfrm>
+          <a:prstGeom prst="rect">
+            <a:avLst/>
+          </a:prstGeom>
+          <a:solidFill>
+            <a:schemeClr val="bg1"/>
+          </a:solidFill>
+          <a:ln>
+            <a:solidFill>
+              <a:schemeClr val="bg1"/>
+            </a:solidFill>
+          </a:ln>
+        </p:spPr>
+        <p:style>
+          <a:lnRef idx="2">
+            <a:schemeClr val="accent1">
+              <a:shade val="50000"/>
+            </a:schemeClr>
+          </a:lnRef>
+          <a:fillRef idx="1">
+            <a:schemeClr val="accent1"/>
+          </a:fillRef>
+          <a:effectRef idx="0">
+            <a:schemeClr val="accent1"/>
+          </a:effectRef>
+          <a:fontRef idx="minor">
+            <a:schemeClr val="lt1"/>
+          </a:fontRef>
+        </p:style>
+        <p:txBody>
+          <a:bodyPr rtlCol="0" anchor="ctr"/>
+          <a:lstStyle/>
+          <a:p>
+            <a:pPr algn="ctr"/>
+            <a:r>
+              <a:rPr lang="fr-FR" sz="3600" dirty="0" smtClean="0">
+                <a:solidFill>
+                  <a:schemeClr val="tx1"/>
+                </a:solidFill>
+              </a:rPr>
+              <a:t>TSOP 44 adapter</a:t>
+            </a:r>
+            <a:endParaRPr lang="fr-FR" sz="3600" dirty="0">
+              <a:solidFill>
+                <a:schemeClr val="tx1"/>
+              </a:solidFill>
+            </a:endParaRPr>
+          </a:p>
+        </p:txBody>
+      </p:sp>
+      <p:sp>
+        <p:nvSpPr>
+          <p:cNvPr id="53" name="Rectangle 52"/>
+          <p:cNvSpPr/>
+          <p:nvPr/>
+        </p:nvSpPr>
+        <p:spPr>
+          <a:xfrm rot="16200000">
+            <a:off x="1143000" y="3143250"/>
+            <a:ext cx="6134100" cy="571500"/>
+          </a:xfrm>
+          <a:prstGeom prst="rect">
+            <a:avLst/>
+          </a:prstGeom>
+          <a:solidFill>
+            <a:schemeClr val="bg1"/>
+          </a:solidFill>
+          <a:ln>
+            <a:solidFill>
+              <a:schemeClr val="bg1"/>
+            </a:solidFill>
+          </a:ln>
+        </p:spPr>
+        <p:style>
+          <a:lnRef idx="2">
+            <a:schemeClr val="accent1">
+              <a:shade val="50000"/>
+            </a:schemeClr>
+          </a:lnRef>
+          <a:fillRef idx="1">
+            <a:schemeClr val="accent1"/>
+          </a:fillRef>
+          <a:effectRef idx="0">
+            <a:schemeClr val="accent1"/>
+          </a:effectRef>
+          <a:fontRef idx="minor">
+            <a:schemeClr val="lt1"/>
+          </a:fontRef>
+        </p:style>
+        <p:txBody>
+          <a:bodyPr rtlCol="0" anchor="ctr"/>
+          <a:lstStyle/>
+          <a:p>
+            <a:pPr algn="ctr"/>
+            <a:endParaRPr lang="fr-FR" sz="3600" dirty="0">
+              <a:solidFill>
+                <a:schemeClr val="tx1"/>
+              </a:solidFill>
+            </a:endParaRPr>
+          </a:p>
+        </p:txBody>
+      </p:sp>
+      <p:sp>
+        <p:nvSpPr>
+          <p:cNvPr id="54" name="Rectangle 53"/>
+          <p:cNvSpPr/>
+          <p:nvPr/>
+        </p:nvSpPr>
+        <p:spPr>
+          <a:xfrm rot="16200000">
+            <a:off x="4210050" y="3048000"/>
+            <a:ext cx="6134100" cy="762000"/>
+          </a:xfrm>
+          <a:prstGeom prst="rect">
+            <a:avLst/>
+          </a:prstGeom>
+          <a:solidFill>
+            <a:schemeClr val="bg1"/>
+          </a:solidFill>
+          <a:ln>
+            <a:solidFill>
+              <a:schemeClr val="bg1"/>
+            </a:solidFill>
+          </a:ln>
+        </p:spPr>
+        <p:style>
+          <a:lnRef idx="2">
+            <a:schemeClr val="accent1">
+              <a:shade val="50000"/>
+            </a:schemeClr>
+          </a:lnRef>
+          <a:fillRef idx="1">
+            <a:schemeClr val="accent1"/>
+          </a:fillRef>
+          <a:effectRef idx="0">
+            <a:schemeClr val="accent1"/>
+          </a:effectRef>
+          <a:fontRef idx="minor">
+            <a:schemeClr val="lt1"/>
+          </a:fontRef>
+        </p:style>
+        <p:txBody>
+          <a:bodyPr rtlCol="0" anchor="ctr"/>
+          <a:lstStyle/>
+          <a:p>
+            <a:pPr algn="ctr"/>
+            <a:endParaRPr lang="fr-FR" sz="3600" dirty="0">
+              <a:solidFill>
+                <a:schemeClr val="tx1"/>
+              </a:solidFill>
+            </a:endParaRPr>
+          </a:p>
+        </p:txBody>
+      </p:sp>
+      <p:sp>
+        <p:nvSpPr>
+          <p:cNvPr id="14" name="ZoneTexte 13"/>
+          <p:cNvSpPr txBox="1"/>
+          <p:nvPr/>
+        </p:nvSpPr>
+        <p:spPr>
+          <a:xfrm>
+            <a:off x="6879094" y="868632"/>
+            <a:ext cx="546410" cy="369332"/>
+          </a:xfrm>
+          <a:prstGeom prst="rect">
+            <a:avLst/>
+          </a:prstGeom>
+          <a:noFill/>
+        </p:spPr>
+        <p:txBody>
+          <a:bodyPr wrap="square" rtlCol="0">
+            <a:spAutoFit/>
+          </a:bodyPr>
+          <a:lstStyle/>
+          <a:p>
+            <a:r>
+              <a:rPr lang="fr-FR" dirty="0" smtClean="0">
+                <a:solidFill>
+                  <a:srgbClr val="FF0000"/>
+                </a:solidFill>
+              </a:rPr>
+              <a:t>A8</a:t>
+            </a:r>
+            <a:endParaRPr lang="fr-FR" dirty="0">
+              <a:solidFill>
+                <a:srgbClr val="FF0000"/>
+              </a:solidFill>
+            </a:endParaRPr>
+          </a:p>
+        </p:txBody>
+      </p:sp>
+      <p:sp>
+        <p:nvSpPr>
+          <p:cNvPr id="16" name="ZoneTexte 15"/>
+          <p:cNvSpPr txBox="1"/>
+          <p:nvPr/>
+        </p:nvSpPr>
+        <p:spPr>
+          <a:xfrm>
+            <a:off x="6886531" y="1143697"/>
+            <a:ext cx="546410" cy="369332"/>
+          </a:xfrm>
+          <a:prstGeom prst="rect">
+            <a:avLst/>
+          </a:prstGeom>
+          <a:noFill/>
+        </p:spPr>
+        <p:txBody>
+          <a:bodyPr wrap="square" rtlCol="0">
+            <a:spAutoFit/>
+          </a:bodyPr>
+          <a:lstStyle/>
+          <a:p>
+            <a:r>
+              <a:rPr lang="fr-FR" dirty="0" smtClean="0">
+                <a:solidFill>
+                  <a:srgbClr val="FF0000"/>
+                </a:solidFill>
+              </a:rPr>
+              <a:t>A9</a:t>
+            </a:r>
+            <a:endParaRPr lang="fr-FR" dirty="0">
+              <a:solidFill>
+                <a:srgbClr val="FF0000"/>
+              </a:solidFill>
+            </a:endParaRPr>
+          </a:p>
+        </p:txBody>
+      </p:sp>
+      <p:sp>
+        <p:nvSpPr>
+          <p:cNvPr id="17" name="ZoneTexte 16"/>
+          <p:cNvSpPr txBox="1"/>
+          <p:nvPr/>
+        </p:nvSpPr>
+        <p:spPr>
+          <a:xfrm>
+            <a:off x="6875378" y="1422477"/>
+            <a:ext cx="747130" cy="369332"/>
+          </a:xfrm>
+          <a:prstGeom prst="rect">
+            <a:avLst/>
+          </a:prstGeom>
+          <a:noFill/>
+        </p:spPr>
+        <p:txBody>
+          <a:bodyPr wrap="square" rtlCol="0">
+            <a:spAutoFit/>
+          </a:bodyPr>
+          <a:lstStyle/>
+          <a:p>
+            <a:r>
+              <a:rPr lang="fr-FR" dirty="0" smtClean="0">
+                <a:solidFill>
+                  <a:srgbClr val="FF0000"/>
+                </a:solidFill>
+              </a:rPr>
+              <a:t>A10</a:t>
+            </a:r>
+          </a:p>
+        </p:txBody>
+      </p:sp>
+      <p:sp>
+        <p:nvSpPr>
+          <p:cNvPr id="18" name="ZoneTexte 17"/>
+          <p:cNvSpPr txBox="1"/>
+          <p:nvPr/>
+        </p:nvSpPr>
+        <p:spPr>
+          <a:xfrm>
+            <a:off x="6871660" y="1708690"/>
+            <a:ext cx="747130" cy="369332"/>
+          </a:xfrm>
+          <a:prstGeom prst="rect">
+            <a:avLst/>
+          </a:prstGeom>
+          <a:noFill/>
+        </p:spPr>
+        <p:txBody>
+          <a:bodyPr wrap="square" rtlCol="0">
+            <a:spAutoFit/>
+          </a:bodyPr>
+          <a:lstStyle/>
+          <a:p>
+            <a:r>
+              <a:rPr lang="fr-FR" dirty="0" smtClean="0">
+                <a:solidFill>
+                  <a:srgbClr val="FF0000"/>
+                </a:solidFill>
+              </a:rPr>
+              <a:t>A11</a:t>
+            </a:r>
+          </a:p>
+        </p:txBody>
+      </p:sp>
+      <p:sp>
+        <p:nvSpPr>
+          <p:cNvPr id="19" name="ZoneTexte 18"/>
+          <p:cNvSpPr txBox="1"/>
+          <p:nvPr/>
+        </p:nvSpPr>
+        <p:spPr>
+          <a:xfrm>
+            <a:off x="6871661" y="1987470"/>
+            <a:ext cx="747130" cy="369332"/>
+          </a:xfrm>
+          <a:prstGeom prst="rect">
+            <a:avLst/>
+          </a:prstGeom>
+          <a:noFill/>
+        </p:spPr>
+        <p:txBody>
+          <a:bodyPr wrap="square" rtlCol="0">
+            <a:spAutoFit/>
+          </a:bodyPr>
+          <a:lstStyle/>
+          <a:p>
+            <a:r>
+              <a:rPr lang="fr-FR" dirty="0" smtClean="0">
+                <a:solidFill>
+                  <a:srgbClr val="FF0000"/>
+                </a:solidFill>
+              </a:rPr>
+              <a:t>A12</a:t>
+            </a:r>
+          </a:p>
+        </p:txBody>
+      </p:sp>
+      <p:sp>
+        <p:nvSpPr>
+          <p:cNvPr id="20" name="ZoneTexte 19"/>
+          <p:cNvSpPr txBox="1"/>
+          <p:nvPr/>
+        </p:nvSpPr>
+        <p:spPr>
+          <a:xfrm>
+            <a:off x="6860510" y="2243950"/>
+            <a:ext cx="747130" cy="369332"/>
+          </a:xfrm>
+          <a:prstGeom prst="rect">
+            <a:avLst/>
+          </a:prstGeom>
+          <a:noFill/>
+        </p:spPr>
+        <p:txBody>
+          <a:bodyPr wrap="square" rtlCol="0">
+            <a:spAutoFit/>
+          </a:bodyPr>
+          <a:lstStyle/>
+          <a:p>
+            <a:r>
+              <a:rPr lang="fr-FR" dirty="0" smtClean="0">
+                <a:solidFill>
+                  <a:srgbClr val="FF0000"/>
+                </a:solidFill>
+              </a:rPr>
+              <a:t>A13</a:t>
+            </a:r>
+          </a:p>
+        </p:txBody>
+      </p:sp>
+      <p:sp>
+        <p:nvSpPr>
+          <p:cNvPr id="21" name="ZoneTexte 20"/>
+          <p:cNvSpPr txBox="1"/>
+          <p:nvPr/>
+        </p:nvSpPr>
+        <p:spPr>
+          <a:xfrm>
+            <a:off x="6860508" y="2545032"/>
+            <a:ext cx="747130" cy="369332"/>
+          </a:xfrm>
+          <a:prstGeom prst="rect">
+            <a:avLst/>
+          </a:prstGeom>
+          <a:noFill/>
+        </p:spPr>
+        <p:txBody>
+          <a:bodyPr wrap="square" rtlCol="0">
+            <a:spAutoFit/>
+          </a:bodyPr>
+          <a:lstStyle/>
+          <a:p>
+            <a:r>
+              <a:rPr lang="fr-FR" dirty="0" smtClean="0">
+                <a:solidFill>
+                  <a:srgbClr val="FF0000"/>
+                </a:solidFill>
+              </a:rPr>
+              <a:t>A14</a:t>
+            </a:r>
+          </a:p>
+        </p:txBody>
+      </p:sp>
+      <p:sp>
+        <p:nvSpPr>
+          <p:cNvPr id="22" name="ZoneTexte 21"/>
+          <p:cNvSpPr txBox="1"/>
+          <p:nvPr/>
+        </p:nvSpPr>
+        <p:spPr>
+          <a:xfrm>
+            <a:off x="6860510" y="2801510"/>
+            <a:ext cx="747130" cy="369332"/>
+          </a:xfrm>
+          <a:prstGeom prst="rect">
+            <a:avLst/>
+          </a:prstGeom>
+          <a:noFill/>
+        </p:spPr>
+        <p:txBody>
+          <a:bodyPr wrap="square" rtlCol="0">
+            <a:spAutoFit/>
+          </a:bodyPr>
+          <a:lstStyle/>
+          <a:p>
+            <a:r>
+              <a:rPr lang="fr-FR" dirty="0" smtClean="0">
+                <a:solidFill>
+                  <a:srgbClr val="FF0000"/>
+                </a:solidFill>
+              </a:rPr>
+              <a:t>A15</a:t>
+            </a:r>
+          </a:p>
+        </p:txBody>
+      </p:sp>
+      <p:sp>
+        <p:nvSpPr>
+          <p:cNvPr id="23" name="ZoneTexte 22"/>
+          <p:cNvSpPr txBox="1"/>
+          <p:nvPr/>
+        </p:nvSpPr>
+        <p:spPr>
+          <a:xfrm>
+            <a:off x="6864693" y="3076573"/>
+            <a:ext cx="747130" cy="369332"/>
+          </a:xfrm>
+          <a:prstGeom prst="rect">
+            <a:avLst/>
+          </a:prstGeom>
+          <a:noFill/>
+        </p:spPr>
+        <p:txBody>
+          <a:bodyPr wrap="square" rtlCol="0">
+            <a:spAutoFit/>
+          </a:bodyPr>
+          <a:lstStyle/>
+          <a:p>
+            <a:r>
+              <a:rPr lang="fr-FR" dirty="0" smtClean="0">
+                <a:solidFill>
+                  <a:srgbClr val="FF0000"/>
+                </a:solidFill>
+              </a:rPr>
+              <a:t>D49</a:t>
+            </a:r>
+          </a:p>
+        </p:txBody>
+      </p:sp>
+      <p:sp>
+        <p:nvSpPr>
+          <p:cNvPr id="26" name="ZoneTexte 25"/>
+          <p:cNvSpPr txBox="1"/>
+          <p:nvPr/>
+        </p:nvSpPr>
+        <p:spPr>
+          <a:xfrm>
+            <a:off x="6867946" y="601001"/>
+            <a:ext cx="669076" cy="369332"/>
+          </a:xfrm>
+          <a:prstGeom prst="rect">
+            <a:avLst/>
+          </a:prstGeom>
+          <a:noFill/>
+        </p:spPr>
+        <p:txBody>
+          <a:bodyPr wrap="square" rtlCol="0">
+            <a:spAutoFit/>
+          </a:bodyPr>
+          <a:lstStyle/>
+          <a:p>
+            <a:r>
+              <a:rPr lang="fr-FR" dirty="0" smtClean="0">
+                <a:solidFill>
+                  <a:srgbClr val="FF0000"/>
+                </a:solidFill>
+              </a:rPr>
+              <a:t>D46</a:t>
+            </a:r>
+          </a:p>
+        </p:txBody>
+      </p:sp>
+      <p:sp>
+        <p:nvSpPr>
+          <p:cNvPr id="27" name="ZoneTexte 26"/>
+          <p:cNvSpPr txBox="1"/>
+          <p:nvPr/>
+        </p:nvSpPr>
+        <p:spPr>
+          <a:xfrm>
+            <a:off x="6875381" y="329655"/>
+            <a:ext cx="669076" cy="369332"/>
+          </a:xfrm>
+          <a:prstGeom prst="rect">
+            <a:avLst/>
+          </a:prstGeom>
+          <a:noFill/>
+        </p:spPr>
+        <p:txBody>
+          <a:bodyPr wrap="square" rtlCol="0">
+            <a:spAutoFit/>
+          </a:bodyPr>
+          <a:lstStyle/>
+          <a:p>
+            <a:r>
+              <a:rPr lang="fr-FR" dirty="0" smtClean="0">
+                <a:solidFill>
+                  <a:srgbClr val="FF0000"/>
+                </a:solidFill>
+              </a:rPr>
+              <a:t>D45</a:t>
+            </a:r>
+          </a:p>
+        </p:txBody>
+      </p:sp>
+      <p:sp>
+        <p:nvSpPr>
+          <p:cNvPr id="28" name="ZoneTexte 27"/>
+          <p:cNvSpPr txBox="1"/>
+          <p:nvPr/>
+        </p:nvSpPr>
+        <p:spPr>
+          <a:xfrm>
+            <a:off x="6864697" y="3355353"/>
+            <a:ext cx="1055648" cy="369332"/>
+          </a:xfrm>
+          <a:prstGeom prst="rect">
+            <a:avLst/>
+          </a:prstGeom>
+          <a:noFill/>
+        </p:spPr>
+        <p:txBody>
+          <a:bodyPr wrap="square" rtlCol="0">
+            <a:spAutoFit/>
+          </a:bodyPr>
+          <a:lstStyle/>
+          <a:p>
+            <a:r>
+              <a:rPr lang="fr-FR" dirty="0" smtClean="0">
+                <a:solidFill>
+                  <a:srgbClr val="FF0000"/>
+                </a:solidFill>
+              </a:rPr>
+              <a:t>D6</a:t>
+            </a:r>
+            <a:endParaRPr lang="fr-FR" dirty="0" smtClean="0">
+              <a:solidFill>
+                <a:srgbClr val="FF0000"/>
+              </a:solidFill>
+            </a:endParaRPr>
+          </a:p>
+        </p:txBody>
+      </p:sp>
+      <p:sp>
+        <p:nvSpPr>
+          <p:cNvPr id="33" name="ZoneTexte 32"/>
+          <p:cNvSpPr txBox="1"/>
+          <p:nvPr/>
+        </p:nvSpPr>
+        <p:spPr>
+          <a:xfrm>
+            <a:off x="6860983" y="3619266"/>
+            <a:ext cx="709958" cy="369332"/>
+          </a:xfrm>
+          <a:prstGeom prst="rect">
+            <a:avLst/>
+          </a:prstGeom>
+          <a:noFill/>
+        </p:spPr>
+        <p:txBody>
+          <a:bodyPr wrap="square" rtlCol="0">
+            <a:spAutoFit/>
+          </a:bodyPr>
+          <a:lstStyle/>
+          <a:p>
+            <a:r>
+              <a:rPr lang="fr-FR" dirty="0" smtClean="0">
+                <a:solidFill>
+                  <a:srgbClr val="FF0000"/>
+                </a:solidFill>
+              </a:rPr>
+              <a:t>GND</a:t>
+            </a:r>
+          </a:p>
+        </p:txBody>
+      </p:sp>
+      <p:sp>
+        <p:nvSpPr>
+          <p:cNvPr id="34" name="ZoneTexte 33"/>
+          <p:cNvSpPr txBox="1"/>
+          <p:nvPr/>
+        </p:nvSpPr>
+        <p:spPr>
+          <a:xfrm>
+            <a:off x="6875387" y="3909197"/>
+            <a:ext cx="709958" cy="369332"/>
+          </a:xfrm>
+          <a:prstGeom prst="rect">
+            <a:avLst/>
+          </a:prstGeom>
+          <a:noFill/>
+        </p:spPr>
+        <p:txBody>
+          <a:bodyPr wrap="square" rtlCol="0">
+            <a:spAutoFit/>
+          </a:bodyPr>
+          <a:lstStyle/>
+          <a:p>
+            <a:r>
+              <a:rPr lang="fr-FR" dirty="0" smtClean="0">
+                <a:solidFill>
+                  <a:srgbClr val="FF0000"/>
+                </a:solidFill>
+              </a:rPr>
+              <a:t>D29</a:t>
+            </a:r>
+          </a:p>
+        </p:txBody>
+      </p:sp>
+      <p:sp>
+        <p:nvSpPr>
+          <p:cNvPr id="35" name="ZoneTexte 34"/>
+          <p:cNvSpPr txBox="1"/>
+          <p:nvPr/>
+        </p:nvSpPr>
+        <p:spPr>
+          <a:xfrm>
+            <a:off x="6882821" y="4429588"/>
+            <a:ext cx="709958" cy="369332"/>
+          </a:xfrm>
+          <a:prstGeom prst="rect">
+            <a:avLst/>
+          </a:prstGeom>
+          <a:noFill/>
+        </p:spPr>
+        <p:txBody>
+          <a:bodyPr wrap="square" rtlCol="0">
+            <a:spAutoFit/>
+          </a:bodyPr>
+          <a:lstStyle/>
+          <a:p>
+            <a:r>
+              <a:rPr lang="fr-FR" dirty="0" smtClean="0">
+                <a:solidFill>
+                  <a:srgbClr val="FF0000"/>
+                </a:solidFill>
+              </a:rPr>
+              <a:t>D28</a:t>
+            </a:r>
+          </a:p>
+        </p:txBody>
+      </p:sp>
+      <p:sp>
+        <p:nvSpPr>
+          <p:cNvPr id="36" name="ZoneTexte 35"/>
+          <p:cNvSpPr txBox="1"/>
+          <p:nvPr/>
+        </p:nvSpPr>
+        <p:spPr>
+          <a:xfrm>
+            <a:off x="6893975" y="4975997"/>
+            <a:ext cx="709958" cy="369332"/>
+          </a:xfrm>
+          <a:prstGeom prst="rect">
+            <a:avLst/>
+          </a:prstGeom>
+          <a:noFill/>
+        </p:spPr>
+        <p:txBody>
+          <a:bodyPr wrap="square" rtlCol="0">
+            <a:spAutoFit/>
+          </a:bodyPr>
+          <a:lstStyle/>
+          <a:p>
+            <a:r>
+              <a:rPr lang="fr-FR" dirty="0" smtClean="0">
+                <a:solidFill>
+                  <a:srgbClr val="FF0000"/>
+                </a:solidFill>
+              </a:rPr>
+              <a:t>D27</a:t>
+            </a:r>
+          </a:p>
+        </p:txBody>
+      </p:sp>
+      <p:sp>
+        <p:nvSpPr>
+          <p:cNvPr id="37" name="ZoneTexte 36"/>
+          <p:cNvSpPr txBox="1"/>
+          <p:nvPr/>
+        </p:nvSpPr>
+        <p:spPr>
+          <a:xfrm>
+            <a:off x="6890259" y="5574446"/>
+            <a:ext cx="709958" cy="369332"/>
+          </a:xfrm>
+          <a:prstGeom prst="rect">
+            <a:avLst/>
+          </a:prstGeom>
+          <a:noFill/>
+        </p:spPr>
+        <p:txBody>
+          <a:bodyPr wrap="square" rtlCol="0">
+            <a:spAutoFit/>
+          </a:bodyPr>
+          <a:lstStyle/>
+          <a:p>
+            <a:r>
+              <a:rPr lang="fr-FR" dirty="0" smtClean="0">
+                <a:solidFill>
+                  <a:srgbClr val="FF0000"/>
+                </a:solidFill>
+              </a:rPr>
+              <a:t>D26</a:t>
+            </a:r>
+          </a:p>
+        </p:txBody>
+      </p:sp>
+      <p:sp>
+        <p:nvSpPr>
+          <p:cNvPr id="42" name="ZoneTexte 41"/>
+          <p:cNvSpPr txBox="1"/>
+          <p:nvPr/>
+        </p:nvSpPr>
+        <p:spPr>
+          <a:xfrm>
+            <a:off x="6867954" y="4191696"/>
+            <a:ext cx="709958" cy="369332"/>
+          </a:xfrm>
+          <a:prstGeom prst="rect">
+            <a:avLst/>
+          </a:prstGeom>
+          <a:noFill/>
+        </p:spPr>
+        <p:txBody>
+          <a:bodyPr wrap="square" rtlCol="0">
+            <a:spAutoFit/>
+          </a:bodyPr>
+          <a:lstStyle/>
+          <a:p>
+            <a:r>
+              <a:rPr lang="fr-FR" dirty="0" smtClean="0">
+                <a:solidFill>
+                  <a:srgbClr val="FF0000"/>
+                </a:solidFill>
+              </a:rPr>
+              <a:t>D30</a:t>
+            </a:r>
+          </a:p>
+        </p:txBody>
+      </p:sp>
+      <p:sp>
+        <p:nvSpPr>
+          <p:cNvPr id="43" name="ZoneTexte 42"/>
+          <p:cNvSpPr txBox="1"/>
+          <p:nvPr/>
+        </p:nvSpPr>
+        <p:spPr>
+          <a:xfrm>
+            <a:off x="6886540" y="4700934"/>
+            <a:ext cx="709958" cy="369332"/>
+          </a:xfrm>
+          <a:prstGeom prst="rect">
+            <a:avLst/>
+          </a:prstGeom>
+          <a:noFill/>
+        </p:spPr>
+        <p:txBody>
+          <a:bodyPr wrap="square" rtlCol="0">
+            <a:spAutoFit/>
+          </a:bodyPr>
+          <a:lstStyle/>
+          <a:p>
+            <a:r>
+              <a:rPr lang="fr-FR" dirty="0" smtClean="0">
+                <a:solidFill>
+                  <a:srgbClr val="FF0000"/>
+                </a:solidFill>
+              </a:rPr>
+              <a:t>D31</a:t>
+            </a:r>
+          </a:p>
+        </p:txBody>
+      </p:sp>
+      <p:sp>
+        <p:nvSpPr>
+          <p:cNvPr id="44" name="ZoneTexte 43"/>
+          <p:cNvSpPr txBox="1"/>
+          <p:nvPr/>
+        </p:nvSpPr>
+        <p:spPr>
+          <a:xfrm>
+            <a:off x="6886541" y="5291949"/>
+            <a:ext cx="709958" cy="369332"/>
+          </a:xfrm>
+          <a:prstGeom prst="rect">
+            <a:avLst/>
+          </a:prstGeom>
+          <a:noFill/>
+        </p:spPr>
+        <p:txBody>
+          <a:bodyPr wrap="square" rtlCol="0">
+            <a:spAutoFit/>
+          </a:bodyPr>
+          <a:lstStyle/>
+          <a:p>
+            <a:r>
+              <a:rPr lang="fr-FR" dirty="0" smtClean="0">
+                <a:solidFill>
+                  <a:srgbClr val="FF0000"/>
+                </a:solidFill>
+              </a:rPr>
+              <a:t>D32</a:t>
+            </a:r>
+          </a:p>
+        </p:txBody>
+      </p:sp>
+      <p:sp>
+        <p:nvSpPr>
+          <p:cNvPr id="45" name="ZoneTexte 44"/>
+          <p:cNvSpPr txBox="1"/>
+          <p:nvPr/>
+        </p:nvSpPr>
+        <p:spPr>
+          <a:xfrm>
+            <a:off x="6893976" y="5845793"/>
+            <a:ext cx="709958" cy="369332"/>
+          </a:xfrm>
+          <a:prstGeom prst="rect">
+            <a:avLst/>
+          </a:prstGeom>
+          <a:noFill/>
+        </p:spPr>
+        <p:txBody>
+          <a:bodyPr wrap="square" rtlCol="0">
+            <a:spAutoFit/>
+          </a:bodyPr>
+          <a:lstStyle/>
+          <a:p>
+            <a:r>
+              <a:rPr lang="fr-FR" dirty="0" smtClean="0">
+                <a:solidFill>
+                  <a:srgbClr val="FF0000"/>
+                </a:solidFill>
+              </a:rPr>
+              <a:t>D33</a:t>
+            </a:r>
+          </a:p>
+        </p:txBody>
+      </p:sp>
+      <p:sp>
+        <p:nvSpPr>
+          <p:cNvPr id="50" name="ZoneTexte 49"/>
+          <p:cNvSpPr txBox="1"/>
+          <p:nvPr/>
+        </p:nvSpPr>
+        <p:spPr>
+          <a:xfrm>
+            <a:off x="6897688" y="6117140"/>
+            <a:ext cx="709958" cy="369332"/>
+          </a:xfrm>
+          <a:prstGeom prst="rect">
+            <a:avLst/>
+          </a:prstGeom>
+          <a:noFill/>
+        </p:spPr>
+        <p:txBody>
+          <a:bodyPr wrap="square" rtlCol="0">
+            <a:spAutoFit/>
+          </a:bodyPr>
+          <a:lstStyle/>
+          <a:p>
+            <a:r>
+              <a:rPr lang="fr-FR" dirty="0" smtClean="0">
+                <a:solidFill>
+                  <a:srgbClr val="FF0000"/>
+                </a:solidFill>
+              </a:rPr>
+              <a:t>VCC</a:t>
+            </a:r>
+          </a:p>
+        </p:txBody>
+      </p:sp>
+      <p:sp>
+        <p:nvSpPr>
+          <p:cNvPr id="38" name="ZoneTexte 37"/>
+          <p:cNvSpPr txBox="1"/>
+          <p:nvPr/>
+        </p:nvSpPr>
+        <p:spPr>
+          <a:xfrm>
+            <a:off x="3931233" y="6105058"/>
+            <a:ext cx="709958" cy="369332"/>
+          </a:xfrm>
+          <a:prstGeom prst="rect">
+            <a:avLst/>
+          </a:prstGeom>
+          <a:noFill/>
+        </p:spPr>
+        <p:txBody>
+          <a:bodyPr wrap="square" rtlCol="0">
+            <a:spAutoFit/>
+          </a:bodyPr>
+          <a:lstStyle/>
+          <a:p>
+            <a:r>
+              <a:rPr lang="fr-FR" dirty="0" smtClean="0">
+                <a:solidFill>
+                  <a:srgbClr val="FF0000"/>
+                </a:solidFill>
+              </a:rPr>
+              <a:t>D25</a:t>
+            </a:r>
+          </a:p>
+        </p:txBody>
+      </p:sp>
+      <p:sp>
+        <p:nvSpPr>
+          <p:cNvPr id="39" name="ZoneTexte 38"/>
+          <p:cNvSpPr txBox="1"/>
+          <p:nvPr/>
+        </p:nvSpPr>
+        <p:spPr>
+          <a:xfrm>
+            <a:off x="3929143" y="5554931"/>
+            <a:ext cx="709958" cy="369332"/>
+          </a:xfrm>
+          <a:prstGeom prst="rect">
+            <a:avLst/>
+          </a:prstGeom>
+          <a:noFill/>
+        </p:spPr>
+        <p:txBody>
+          <a:bodyPr wrap="square" rtlCol="0">
+            <a:spAutoFit/>
+          </a:bodyPr>
+          <a:lstStyle/>
+          <a:p>
+            <a:r>
+              <a:rPr lang="fr-FR" dirty="0" smtClean="0">
+                <a:solidFill>
+                  <a:srgbClr val="FF0000"/>
+                </a:solidFill>
+              </a:rPr>
+              <a:t>D24</a:t>
+            </a:r>
+          </a:p>
+        </p:txBody>
+      </p:sp>
+      <p:sp>
+        <p:nvSpPr>
+          <p:cNvPr id="40" name="ZoneTexte 39"/>
+          <p:cNvSpPr txBox="1"/>
+          <p:nvPr/>
+        </p:nvSpPr>
+        <p:spPr>
+          <a:xfrm>
+            <a:off x="3930769" y="5030823"/>
+            <a:ext cx="709958" cy="369332"/>
+          </a:xfrm>
+          <a:prstGeom prst="rect">
+            <a:avLst/>
+          </a:prstGeom>
+          <a:noFill/>
+        </p:spPr>
+        <p:txBody>
+          <a:bodyPr wrap="square" rtlCol="0">
+            <a:spAutoFit/>
+          </a:bodyPr>
+          <a:lstStyle/>
+          <a:p>
+            <a:r>
+              <a:rPr lang="fr-FR" dirty="0" smtClean="0">
+                <a:solidFill>
+                  <a:srgbClr val="FF0000"/>
+                </a:solidFill>
+              </a:rPr>
+              <a:t>D23</a:t>
+            </a:r>
+          </a:p>
+        </p:txBody>
+      </p:sp>
+      <p:sp>
+        <p:nvSpPr>
+          <p:cNvPr id="41" name="ZoneTexte 40"/>
+          <p:cNvSpPr txBox="1"/>
+          <p:nvPr/>
+        </p:nvSpPr>
+        <p:spPr>
+          <a:xfrm>
+            <a:off x="3932860" y="4499280"/>
+            <a:ext cx="709958" cy="369332"/>
+          </a:xfrm>
+          <a:prstGeom prst="rect">
+            <a:avLst/>
+          </a:prstGeom>
+          <a:noFill/>
+        </p:spPr>
+        <p:txBody>
+          <a:bodyPr wrap="square" rtlCol="0">
+            <a:spAutoFit/>
+          </a:bodyPr>
+          <a:lstStyle/>
+          <a:p>
+            <a:r>
+              <a:rPr lang="fr-FR" dirty="0" smtClean="0">
+                <a:solidFill>
+                  <a:srgbClr val="FF0000"/>
+                </a:solidFill>
+              </a:rPr>
+              <a:t>D22</a:t>
+            </a:r>
+          </a:p>
+        </p:txBody>
+      </p:sp>
+      <p:sp>
+        <p:nvSpPr>
+          <p:cNvPr id="46" name="ZoneTexte 45"/>
+          <p:cNvSpPr txBox="1"/>
+          <p:nvPr/>
+        </p:nvSpPr>
+        <p:spPr>
+          <a:xfrm>
+            <a:off x="3931236" y="5837430"/>
+            <a:ext cx="709958" cy="369332"/>
+          </a:xfrm>
+          <a:prstGeom prst="rect">
+            <a:avLst/>
+          </a:prstGeom>
+          <a:noFill/>
+        </p:spPr>
+        <p:txBody>
+          <a:bodyPr wrap="square" rtlCol="0">
+            <a:spAutoFit/>
+          </a:bodyPr>
+          <a:lstStyle/>
+          <a:p>
+            <a:r>
+              <a:rPr lang="fr-FR" dirty="0" smtClean="0">
+                <a:solidFill>
+                  <a:srgbClr val="FF0000"/>
+                </a:solidFill>
+              </a:rPr>
+              <a:t>D34</a:t>
+            </a:r>
+          </a:p>
+        </p:txBody>
+      </p:sp>
+      <p:sp>
+        <p:nvSpPr>
+          <p:cNvPr id="47" name="ZoneTexte 46"/>
+          <p:cNvSpPr txBox="1"/>
+          <p:nvPr/>
+        </p:nvSpPr>
+        <p:spPr>
+          <a:xfrm>
+            <a:off x="3930771" y="5287304"/>
+            <a:ext cx="709958" cy="369332"/>
+          </a:xfrm>
+          <a:prstGeom prst="rect">
+            <a:avLst/>
+          </a:prstGeom>
+          <a:noFill/>
+        </p:spPr>
+        <p:txBody>
+          <a:bodyPr wrap="square" rtlCol="0">
+            <a:spAutoFit/>
+          </a:bodyPr>
+          <a:lstStyle/>
+          <a:p>
+            <a:r>
+              <a:rPr lang="fr-FR" dirty="0" smtClean="0">
+                <a:solidFill>
+                  <a:srgbClr val="FF0000"/>
+                </a:solidFill>
+              </a:rPr>
+              <a:t>D35</a:t>
+            </a:r>
+          </a:p>
+        </p:txBody>
+      </p:sp>
+      <p:sp>
+        <p:nvSpPr>
+          <p:cNvPr id="48" name="ZoneTexte 47"/>
+          <p:cNvSpPr txBox="1"/>
+          <p:nvPr/>
+        </p:nvSpPr>
+        <p:spPr>
+          <a:xfrm>
+            <a:off x="3930771" y="4763196"/>
+            <a:ext cx="709958" cy="369332"/>
+          </a:xfrm>
+          <a:prstGeom prst="rect">
+            <a:avLst/>
+          </a:prstGeom>
+          <a:noFill/>
+        </p:spPr>
+        <p:txBody>
+          <a:bodyPr wrap="square" rtlCol="0">
+            <a:spAutoFit/>
+          </a:bodyPr>
+          <a:lstStyle/>
+          <a:p>
+            <a:r>
+              <a:rPr lang="fr-FR" dirty="0" smtClean="0">
+                <a:solidFill>
+                  <a:srgbClr val="FF0000"/>
+                </a:solidFill>
+              </a:rPr>
+              <a:t>D36</a:t>
+            </a:r>
+          </a:p>
+        </p:txBody>
+      </p:sp>
+      <p:sp>
+        <p:nvSpPr>
+          <p:cNvPr id="49" name="ZoneTexte 48"/>
+          <p:cNvSpPr txBox="1"/>
+          <p:nvPr/>
+        </p:nvSpPr>
+        <p:spPr>
+          <a:xfrm>
+            <a:off x="3940297" y="4216787"/>
+            <a:ext cx="709958" cy="369332"/>
+          </a:xfrm>
+          <a:prstGeom prst="rect">
+            <a:avLst/>
+          </a:prstGeom>
+          <a:noFill/>
+        </p:spPr>
+        <p:txBody>
+          <a:bodyPr wrap="square" rtlCol="0">
+            <a:spAutoFit/>
+          </a:bodyPr>
+          <a:lstStyle/>
+          <a:p>
+            <a:r>
+              <a:rPr lang="fr-FR" dirty="0" smtClean="0">
+                <a:solidFill>
+                  <a:srgbClr val="FF0000"/>
+                </a:solidFill>
+              </a:rPr>
+              <a:t>D37</a:t>
+            </a:r>
+          </a:p>
+        </p:txBody>
+      </p:sp>
+      <p:sp>
+        <p:nvSpPr>
+          <p:cNvPr id="6" name="ZoneTexte 5"/>
+          <p:cNvSpPr txBox="1"/>
+          <p:nvPr/>
+        </p:nvSpPr>
+        <p:spPr>
+          <a:xfrm>
+            <a:off x="3937042" y="3101665"/>
+            <a:ext cx="546410" cy="369332"/>
+          </a:xfrm>
+          <a:prstGeom prst="rect">
+            <a:avLst/>
+          </a:prstGeom>
+          <a:noFill/>
+        </p:spPr>
+        <p:txBody>
+          <a:bodyPr wrap="square" rtlCol="0">
+            <a:spAutoFit/>
+          </a:bodyPr>
+          <a:lstStyle/>
+          <a:p>
+            <a:r>
+              <a:rPr lang="fr-FR" dirty="0" smtClean="0">
+                <a:solidFill>
+                  <a:srgbClr val="FF0000"/>
+                </a:solidFill>
+              </a:rPr>
+              <a:t>A0</a:t>
+            </a:r>
+            <a:endParaRPr lang="fr-FR" dirty="0">
+              <a:solidFill>
+                <a:srgbClr val="FF0000"/>
+              </a:solidFill>
+            </a:endParaRPr>
+          </a:p>
+        </p:txBody>
+      </p:sp>
+      <p:sp>
+        <p:nvSpPr>
+          <p:cNvPr id="7" name="ZoneTexte 6"/>
+          <p:cNvSpPr txBox="1"/>
+          <p:nvPr/>
+        </p:nvSpPr>
+        <p:spPr>
+          <a:xfrm>
+            <a:off x="3944478" y="2819168"/>
+            <a:ext cx="546410" cy="369332"/>
+          </a:xfrm>
+          <a:prstGeom prst="rect">
+            <a:avLst/>
+          </a:prstGeom>
+          <a:noFill/>
+        </p:spPr>
+        <p:txBody>
+          <a:bodyPr wrap="square" rtlCol="0">
+            <a:spAutoFit/>
+          </a:bodyPr>
+          <a:lstStyle/>
+          <a:p>
+            <a:r>
+              <a:rPr lang="fr-FR" dirty="0" smtClean="0">
+                <a:solidFill>
+                  <a:srgbClr val="FF0000"/>
+                </a:solidFill>
+              </a:rPr>
+              <a:t>A1</a:t>
+            </a:r>
+            <a:endParaRPr lang="fr-FR" dirty="0">
+              <a:solidFill>
+                <a:srgbClr val="FF0000"/>
+              </a:solidFill>
+            </a:endParaRPr>
+          </a:p>
+        </p:txBody>
+      </p:sp>
+      <p:sp>
+        <p:nvSpPr>
+          <p:cNvPr id="8" name="ZoneTexte 7"/>
+          <p:cNvSpPr txBox="1"/>
+          <p:nvPr/>
+        </p:nvSpPr>
+        <p:spPr>
+          <a:xfrm>
+            <a:off x="3934952" y="2538762"/>
+            <a:ext cx="546410" cy="369332"/>
+          </a:xfrm>
+          <a:prstGeom prst="rect">
+            <a:avLst/>
+          </a:prstGeom>
+          <a:noFill/>
+        </p:spPr>
+        <p:txBody>
+          <a:bodyPr wrap="square" rtlCol="0">
+            <a:spAutoFit/>
+          </a:bodyPr>
+          <a:lstStyle/>
+          <a:p>
+            <a:r>
+              <a:rPr lang="fr-FR" dirty="0" smtClean="0">
+                <a:solidFill>
+                  <a:srgbClr val="FF0000"/>
+                </a:solidFill>
+              </a:rPr>
+              <a:t>A2</a:t>
+            </a:r>
+          </a:p>
+        </p:txBody>
+      </p:sp>
+      <p:sp>
+        <p:nvSpPr>
+          <p:cNvPr id="9" name="ZoneTexte 8"/>
+          <p:cNvSpPr txBox="1"/>
+          <p:nvPr/>
+        </p:nvSpPr>
+        <p:spPr>
+          <a:xfrm>
+            <a:off x="3934952" y="2245809"/>
+            <a:ext cx="546410" cy="369332"/>
+          </a:xfrm>
+          <a:prstGeom prst="rect">
+            <a:avLst/>
+          </a:prstGeom>
+          <a:noFill/>
+        </p:spPr>
+        <p:txBody>
+          <a:bodyPr wrap="square" rtlCol="0">
+            <a:spAutoFit/>
+          </a:bodyPr>
+          <a:lstStyle/>
+          <a:p>
+            <a:r>
+              <a:rPr lang="fr-FR" dirty="0" smtClean="0">
+                <a:solidFill>
+                  <a:srgbClr val="FF0000"/>
+                </a:solidFill>
+              </a:rPr>
+              <a:t>A3</a:t>
+            </a:r>
+            <a:endParaRPr lang="fr-FR" dirty="0">
+              <a:solidFill>
+                <a:srgbClr val="FF0000"/>
+              </a:solidFill>
+            </a:endParaRPr>
+          </a:p>
+        </p:txBody>
+      </p:sp>
+      <p:sp>
+        <p:nvSpPr>
+          <p:cNvPr id="10" name="ZoneTexte 9"/>
+          <p:cNvSpPr txBox="1"/>
+          <p:nvPr/>
+        </p:nvSpPr>
+        <p:spPr>
+          <a:xfrm>
+            <a:off x="3934950" y="1992351"/>
+            <a:ext cx="546410" cy="369332"/>
+          </a:xfrm>
+          <a:prstGeom prst="rect">
+            <a:avLst/>
+          </a:prstGeom>
+          <a:noFill/>
+        </p:spPr>
+        <p:txBody>
+          <a:bodyPr wrap="square" rtlCol="0">
+            <a:spAutoFit/>
+          </a:bodyPr>
+          <a:lstStyle/>
+          <a:p>
+            <a:r>
+              <a:rPr lang="fr-FR" dirty="0" smtClean="0">
+                <a:solidFill>
+                  <a:srgbClr val="FF0000"/>
+                </a:solidFill>
+              </a:rPr>
+              <a:t>A4</a:t>
+            </a:r>
+            <a:endParaRPr lang="fr-FR" dirty="0">
+              <a:solidFill>
+                <a:srgbClr val="FF0000"/>
+              </a:solidFill>
+            </a:endParaRPr>
+          </a:p>
+        </p:txBody>
+      </p:sp>
+      <p:sp>
+        <p:nvSpPr>
+          <p:cNvPr id="11" name="ZoneTexte 10"/>
+          <p:cNvSpPr txBox="1"/>
+          <p:nvPr/>
+        </p:nvSpPr>
+        <p:spPr>
+          <a:xfrm>
+            <a:off x="3934951" y="1715196"/>
+            <a:ext cx="546410" cy="369332"/>
+          </a:xfrm>
+          <a:prstGeom prst="rect">
+            <a:avLst/>
+          </a:prstGeom>
+          <a:noFill/>
+        </p:spPr>
+        <p:txBody>
+          <a:bodyPr wrap="square" rtlCol="0">
+            <a:spAutoFit/>
+          </a:bodyPr>
+          <a:lstStyle/>
+          <a:p>
+            <a:r>
+              <a:rPr lang="fr-FR" dirty="0" smtClean="0">
+                <a:solidFill>
+                  <a:srgbClr val="FF0000"/>
+                </a:solidFill>
+              </a:rPr>
+              <a:t>A5</a:t>
+            </a:r>
+            <a:endParaRPr lang="fr-FR" dirty="0">
+              <a:solidFill>
+                <a:srgbClr val="FF0000"/>
+              </a:solidFill>
+            </a:endParaRPr>
+          </a:p>
+        </p:txBody>
+      </p:sp>
+      <p:sp>
+        <p:nvSpPr>
+          <p:cNvPr id="12" name="ZoneTexte 11"/>
+          <p:cNvSpPr txBox="1"/>
+          <p:nvPr/>
+        </p:nvSpPr>
+        <p:spPr>
+          <a:xfrm>
+            <a:off x="3931234" y="1435950"/>
+            <a:ext cx="546410" cy="369332"/>
+          </a:xfrm>
+          <a:prstGeom prst="rect">
+            <a:avLst/>
+          </a:prstGeom>
+          <a:noFill/>
+        </p:spPr>
+        <p:txBody>
+          <a:bodyPr wrap="square" rtlCol="0">
+            <a:spAutoFit/>
+          </a:bodyPr>
+          <a:lstStyle/>
+          <a:p>
+            <a:r>
+              <a:rPr lang="fr-FR" dirty="0" smtClean="0">
+                <a:solidFill>
+                  <a:srgbClr val="FF0000"/>
+                </a:solidFill>
+              </a:rPr>
+              <a:t>A6</a:t>
+            </a:r>
+            <a:endParaRPr lang="fr-FR" dirty="0">
+              <a:solidFill>
+                <a:srgbClr val="FF0000"/>
+              </a:solidFill>
+            </a:endParaRPr>
+          </a:p>
+        </p:txBody>
+      </p:sp>
+      <p:sp>
+        <p:nvSpPr>
+          <p:cNvPr id="13" name="ZoneTexte 12"/>
+          <p:cNvSpPr txBox="1"/>
+          <p:nvPr/>
+        </p:nvSpPr>
+        <p:spPr>
+          <a:xfrm>
+            <a:off x="3942386" y="1187373"/>
+            <a:ext cx="546410" cy="369332"/>
+          </a:xfrm>
+          <a:prstGeom prst="rect">
+            <a:avLst/>
+          </a:prstGeom>
+          <a:noFill/>
+        </p:spPr>
+        <p:txBody>
+          <a:bodyPr wrap="square" rtlCol="0">
+            <a:spAutoFit/>
+          </a:bodyPr>
+          <a:lstStyle/>
+          <a:p>
+            <a:r>
+              <a:rPr lang="fr-FR" dirty="0" smtClean="0">
+                <a:solidFill>
+                  <a:srgbClr val="FF0000"/>
+                </a:solidFill>
+              </a:rPr>
+              <a:t>A7</a:t>
+            </a:r>
+            <a:endParaRPr lang="fr-FR" dirty="0">
+              <a:solidFill>
+                <a:srgbClr val="FF0000"/>
+              </a:solidFill>
+            </a:endParaRPr>
+          </a:p>
+        </p:txBody>
+      </p:sp>
+      <p:sp>
+        <p:nvSpPr>
+          <p:cNvPr id="24" name="ZoneTexte 23"/>
+          <p:cNvSpPr txBox="1"/>
+          <p:nvPr/>
+        </p:nvSpPr>
+        <p:spPr>
+          <a:xfrm>
+            <a:off x="3929139" y="906498"/>
+            <a:ext cx="669076" cy="369332"/>
+          </a:xfrm>
+          <a:prstGeom prst="rect">
+            <a:avLst/>
+          </a:prstGeom>
+          <a:noFill/>
+        </p:spPr>
+        <p:txBody>
+          <a:bodyPr wrap="square" rtlCol="0">
+            <a:spAutoFit/>
+          </a:bodyPr>
+          <a:lstStyle/>
+          <a:p>
+            <a:r>
+              <a:rPr lang="fr-FR" dirty="0" smtClean="0">
+                <a:solidFill>
+                  <a:srgbClr val="FF0000"/>
+                </a:solidFill>
+              </a:rPr>
+              <a:t>D48</a:t>
+            </a:r>
+          </a:p>
+        </p:txBody>
+      </p:sp>
+      <p:sp>
+        <p:nvSpPr>
+          <p:cNvPr id="25" name="ZoneTexte 24"/>
+          <p:cNvSpPr txBox="1"/>
+          <p:nvPr/>
+        </p:nvSpPr>
+        <p:spPr>
+          <a:xfrm>
+            <a:off x="3927048" y="611224"/>
+            <a:ext cx="669076" cy="369332"/>
+          </a:xfrm>
+          <a:prstGeom prst="rect">
+            <a:avLst/>
+          </a:prstGeom>
+          <a:noFill/>
+        </p:spPr>
+        <p:txBody>
+          <a:bodyPr wrap="square" rtlCol="0">
+            <a:spAutoFit/>
+          </a:bodyPr>
+          <a:lstStyle/>
+          <a:p>
+            <a:r>
+              <a:rPr lang="fr-FR" dirty="0" smtClean="0">
+                <a:solidFill>
+                  <a:srgbClr val="FF0000"/>
+                </a:solidFill>
+              </a:rPr>
+              <a:t>D47</a:t>
+            </a:r>
+          </a:p>
+        </p:txBody>
+      </p:sp>
+      <p:sp>
+        <p:nvSpPr>
+          <p:cNvPr id="29" name="ZoneTexte 28"/>
+          <p:cNvSpPr txBox="1"/>
+          <p:nvPr/>
+        </p:nvSpPr>
+        <p:spPr>
+          <a:xfrm>
+            <a:off x="3932392" y="313857"/>
+            <a:ext cx="557560" cy="369332"/>
+          </a:xfrm>
+          <a:prstGeom prst="rect">
+            <a:avLst/>
+          </a:prstGeom>
+          <a:noFill/>
+        </p:spPr>
+        <p:txBody>
+          <a:bodyPr wrap="square" rtlCol="0">
+            <a:spAutoFit/>
+          </a:bodyPr>
+          <a:lstStyle/>
+          <a:p>
+            <a:r>
+              <a:rPr lang="fr-FR" dirty="0" smtClean="0">
+                <a:solidFill>
+                  <a:srgbClr val="FF0000"/>
+                </a:solidFill>
+              </a:rPr>
+              <a:t>D7</a:t>
+            </a:r>
+          </a:p>
+        </p:txBody>
+      </p:sp>
+      <p:sp>
+        <p:nvSpPr>
+          <p:cNvPr id="30" name="ZoneTexte 29"/>
+          <p:cNvSpPr txBox="1"/>
+          <p:nvPr/>
+        </p:nvSpPr>
+        <p:spPr>
+          <a:xfrm>
+            <a:off x="3931696" y="3365575"/>
+            <a:ext cx="557560" cy="369332"/>
+          </a:xfrm>
+          <a:prstGeom prst="rect">
+            <a:avLst/>
+          </a:prstGeom>
+          <a:noFill/>
+        </p:spPr>
+        <p:txBody>
+          <a:bodyPr wrap="square" rtlCol="0">
+            <a:spAutoFit/>
+          </a:bodyPr>
+          <a:lstStyle/>
+          <a:p>
+            <a:r>
+              <a:rPr lang="fr-FR" dirty="0" smtClean="0">
+                <a:solidFill>
+                  <a:srgbClr val="FF0000"/>
+                </a:solidFill>
+              </a:rPr>
+              <a:t>D9</a:t>
+            </a:r>
+          </a:p>
+        </p:txBody>
+      </p:sp>
+      <p:sp>
+        <p:nvSpPr>
+          <p:cNvPr id="31" name="ZoneTexte 30"/>
+          <p:cNvSpPr txBox="1"/>
+          <p:nvPr/>
+        </p:nvSpPr>
+        <p:spPr>
+          <a:xfrm>
+            <a:off x="3939131" y="3908268"/>
+            <a:ext cx="557560" cy="369332"/>
+          </a:xfrm>
+          <a:prstGeom prst="rect">
+            <a:avLst/>
+          </a:prstGeom>
+          <a:noFill/>
+        </p:spPr>
+        <p:txBody>
+          <a:bodyPr wrap="square" rtlCol="0">
+            <a:spAutoFit/>
+          </a:bodyPr>
+          <a:lstStyle/>
+          <a:p>
+            <a:r>
+              <a:rPr lang="fr-FR" dirty="0" smtClean="0">
+                <a:solidFill>
+                  <a:srgbClr val="FF0000"/>
+                </a:solidFill>
+              </a:rPr>
+              <a:t>D16</a:t>
+            </a:r>
+          </a:p>
+        </p:txBody>
+      </p:sp>
+      <p:sp>
+        <p:nvSpPr>
+          <p:cNvPr id="32" name="ZoneTexte 31"/>
+          <p:cNvSpPr txBox="1"/>
+          <p:nvPr/>
+        </p:nvSpPr>
+        <p:spPr>
+          <a:xfrm>
+            <a:off x="3926354" y="3640639"/>
+            <a:ext cx="709958" cy="369332"/>
+          </a:xfrm>
+          <a:prstGeom prst="rect">
+            <a:avLst/>
+          </a:prstGeom>
+          <a:noFill/>
+        </p:spPr>
+        <p:txBody>
+          <a:bodyPr wrap="square" rtlCol="0">
+            <a:spAutoFit/>
+          </a:bodyPr>
+          <a:lstStyle/>
+          <a:p>
+            <a:r>
+              <a:rPr lang="fr-FR" dirty="0" smtClean="0">
+                <a:solidFill>
+                  <a:srgbClr val="FF0000"/>
+                </a:solidFill>
+              </a:rPr>
+              <a:t>GND</a:t>
+            </a:r>
+          </a:p>
+        </p:txBody>
+      </p:sp>
+      <p:sp>
+        <p:nvSpPr>
+          <p:cNvPr id="51" name="Rectangle 50"/>
+          <p:cNvSpPr/>
+          <p:nvPr/>
+        </p:nvSpPr>
+        <p:spPr>
+          <a:xfrm rot="16200000">
+            <a:off x="2053582" y="3053369"/>
+            <a:ext cx="3285451" cy="461665"/>
+          </a:xfrm>
+          <a:prstGeom prst="rect">
+            <a:avLst/>
+          </a:prstGeom>
+        </p:spPr>
+        <p:txBody>
+          <a:bodyPr wrap="none">
+            <a:spAutoFit/>
+          </a:bodyPr>
+          <a:lstStyle/>
+          <a:p>
+            <a:r>
+              <a:rPr lang="fr-FR" sz="2400" b="1" dirty="0" err="1" smtClean="0">
+                <a:solidFill>
+                  <a:srgbClr val="FF0000"/>
+                </a:solidFill>
+              </a:rPr>
+              <a:t>Arduino</a:t>
+            </a:r>
+            <a:r>
+              <a:rPr lang="fr-FR" sz="2400" b="1" dirty="0" smtClean="0">
+                <a:solidFill>
+                  <a:srgbClr val="FF0000"/>
+                </a:solidFill>
+              </a:rPr>
+              <a:t> </a:t>
+            </a:r>
+            <a:r>
+              <a:rPr lang="fr-FR" sz="2400" b="1" dirty="0" err="1" smtClean="0">
+                <a:solidFill>
+                  <a:srgbClr val="FF0000"/>
+                </a:solidFill>
+              </a:rPr>
+              <a:t>Mega</a:t>
+            </a:r>
+            <a:r>
+              <a:rPr lang="fr-FR" sz="2400" b="1" dirty="0" smtClean="0">
+                <a:solidFill>
+                  <a:srgbClr val="FF0000"/>
+                </a:solidFill>
+              </a:rPr>
+              <a:t> 2560 </a:t>
+            </a:r>
+            <a:r>
+              <a:rPr lang="fr-FR" sz="2400" b="1" dirty="0" smtClean="0">
+                <a:solidFill>
+                  <a:srgbClr val="FF0000"/>
+                </a:solidFill>
+              </a:rPr>
+              <a:t>Pins</a:t>
+            </a:r>
+            <a:endParaRPr lang="fr-FR" sz="2400" dirty="0">
+              <a:solidFill>
+                <a:srgbClr val="FF0000"/>
+              </a:solidFill>
+            </a:endParaRPr>
+          </a:p>
+        </p:txBody>
+      </p:sp>
+    </p:spTree>
+    <p:extLst>
+      <p:ext uri="{BB962C8B-B14F-4D97-AF65-F5344CB8AC3E}">
+        <p14:creationId xmlns:p14="http://schemas.microsoft.com/office/powerpoint/2010/main" val="3182372557"/>
+      </p:ext>
+    </p:extLst>
   </p:cSld>
   <p:clrMapOvr>
     <a:masterClrMapping/>
@@ -6325,7 +8143,7 @@
     </p:spTree>
     <p:extLst>
       <p:ext uri="{BB962C8B-B14F-4D97-AF65-F5344CB8AC3E}">
-        <p14:creationId xmlns="" xmlns:p14="http://schemas.microsoft.com/office/powerpoint/2010/main" val="3760226372"/>
+        <p14:creationId xmlns:p14="http://schemas.microsoft.com/office/powerpoint/2010/main" val="3760226372"/>
       </p:ext>
     </p:extLst>
   </p:cSld>
@@ -6516,7 +8334,7 @@
     </p:spTree>
     <p:extLst>
       <p:ext uri="{BB962C8B-B14F-4D97-AF65-F5344CB8AC3E}">
-        <p14:creationId xmlns="" xmlns:p14="http://schemas.microsoft.com/office/powerpoint/2010/main" val="3452558061"/>
+        <p14:creationId xmlns:p14="http://schemas.microsoft.com/office/powerpoint/2010/main" val="3452558061"/>
       </p:ext>
     </p:extLst>
   </p:cSld>
@@ -6670,7 +8488,7 @@
     </p:spTree>
     <p:extLst>
       <p:ext uri="{BB962C8B-B14F-4D97-AF65-F5344CB8AC3E}">
-        <p14:creationId xmlns="" xmlns:p14="http://schemas.microsoft.com/office/powerpoint/2010/main" val="141957672"/>
+        <p14:creationId xmlns:p14="http://schemas.microsoft.com/office/powerpoint/2010/main" val="141957672"/>
       </p:ext>
     </p:extLst>
   </p:cSld>
@@ -6955,7 +8773,7 @@
     </p:spTree>
     <p:extLst>
       <p:ext uri="{BB962C8B-B14F-4D97-AF65-F5344CB8AC3E}">
-        <p14:creationId xmlns="" xmlns:p14="http://schemas.microsoft.com/office/powerpoint/2010/main" val="141957672"/>
+        <p14:creationId xmlns:p14="http://schemas.microsoft.com/office/powerpoint/2010/main" val="141957672"/>
       </p:ext>
     </p:extLst>
   </p:cSld>
@@ -7435,7 +9253,7 @@
   <a:extraClrSchemeLst/>
   <a:extLst>
     <a:ext uri="{05A4C25C-085E-4340-85A3-A5531E510DB2}">
-      <thm15:themeFamily xmlns="" xmlns:thm15="http://schemas.microsoft.com/office/thememl/2012/main" name="Office Theme" id="{62F939B6-93AF-4DB8-9C6B-D6C7DFDC589F}" vid="{4A3C46E8-61CC-4603-A589-7422A47A8E4A}"/>
+      <thm15:themeFamily xmlns:thm15="http://schemas.microsoft.com/office/thememl/2012/main" name="Office Theme" id="{62F939B6-93AF-4DB8-9C6B-D6C7DFDC589F}" vid="{4A3C46E8-61CC-4603-A589-7422A47A8E4A}"/>
     </a:ext>
   </a:extLst>
 </a:theme>
